--- a/Презентация/готовые/РЕХАУ Калькулятор снеготаяния — техническая презентация.pptx
+++ b/Презентация/готовые/РЕХАУ Калькулятор снеготаяния — техническая презентация.pptx
@@ -143,9 +143,35 @@
           </a:ln>
         </p:spPr>
       </p:pic>
-      <p:sp>
-        <p:nvSpPr>
-          <p:cNvPr id="4" name="accent-bar"/>
+      <p:pic>
+        <p:nvPicPr>
+          <p:cNvPr id="4" name="app-icon"/>
+          <p:cNvPicPr/>
+          <p:nvPr/>
+        </p:nvPicPr>
+        <p:blipFill>
+          <a:blip r:embed="rId4"/>
+          <a:srcRect l="0" r="0"/>
+          <a:stretch>
+            <a:fillRect/>
+          </a:stretch>
+        </p:blipFill>
+        <p:spPr>
+          <a:xfrm>
+            <a:off x="10058400" y="2844800"/>
+            <a:ext cx="1371600" cy="1371600"/>
+          </a:xfrm>
+          <a:prstGeom prst="rect">
+            <a:avLst/>
+          </a:prstGeom>
+          <a:ln>
+            <a:noFill/>
+          </a:ln>
+        </p:spPr>
+      </p:pic>
+      <p:sp>
+        <p:nvSpPr>
+          <p:cNvPr id="5" name="accent-bar"/>
           <p:cNvSpPr/>
           <p:nvPr/>
         </p:nvSpPr>
@@ -167,7 +193,7 @@
       </p:sp>
       <p:sp>
         <p:nvSpPr>
-          <p:cNvPr id="5" name="title"/>
+          <p:cNvPr id="6" name="title"/>
           <p:cNvSpPr txBox="1"/>
           <p:nvPr/>
         </p:nvSpPr>
@@ -194,7 +220,7 @@
               </a:lnSpc>
             </a:pPr>
             <a:r>
-              <a:rPr lang="en-US" sz="4200" b="1">
+              <a:rPr lang="en-US" sz="4200" noProof="1" b="1">
                 <a:solidFill>
                   <a:srgbClr val="000000"/>
                 </a:solidFill>
@@ -203,13 +229,13 @@
               </a:rPr>
               <a:t>Калькулятор снеготаяния</a:t>
             </a:r>
-            <a:endParaRPr lang="en-US" sz="4200"/>
-          </a:p>
-        </p:txBody>
-      </p:sp>
-      <p:sp>
-        <p:nvSpPr>
-          <p:cNvPr id="6" name="subtitle"/>
+            <a:endParaRPr lang="en-US" sz="4200" noProof="1"/>
+          </a:p>
+        </p:txBody>
+      </p:sp>
+      <p:sp>
+        <p:nvSpPr>
+          <p:cNvPr id="7" name="subtitle"/>
           <p:cNvSpPr txBox="1"/>
           <p:nvPr/>
         </p:nvSpPr>
@@ -236,7 +262,7 @@
               </a:lnSpc>
             </a:pPr>
             <a:r>
-              <a:rPr lang="en-US" sz="1700">
+              <a:rPr lang="en-US" sz="1700" noProof="1">
                 <a:solidFill>
                   <a:srgbClr val="4E4E4E"/>
                 </a:solidFill>
@@ -245,18 +271,18 @@
               </a:rPr>
               <a:t>Тепловой и гидравлический расчёт систем антиобледенения открытых площадок — по нормативам, с продукцией РЕХАУ</a:t>
             </a:r>
-            <a:endParaRPr lang="en-US" sz="1700"/>
+            <a:endParaRPr lang="en-US" sz="1700" noProof="1"/>
           </a:p>
         </p:txBody>
       </p:sp>
       <p:pic>
         <p:nvPicPr>
-          <p:cNvPr id="7" name="squares-br"/>
+          <p:cNvPr id="8" name="squares-br"/>
           <p:cNvPicPr/>
           <p:nvPr/>
         </p:nvPicPr>
         <p:blipFill>
-          <a:blip r:embed="rId4"/>
+          <a:blip r:embed="rId5"/>
           <a:srcRect l="-36" r="-36"/>
           <a:stretch>
             <a:fillRect/>
@@ -277,7 +303,7 @@
       </p:pic>
       <p:sp>
         <p:nvSpPr>
-          <p:cNvPr id="8" name="slogan"/>
+          <p:cNvPr id="9" name="slogan"/>
           <p:cNvSpPr txBox="1"/>
           <p:nvPr/>
         </p:nvSpPr>
@@ -304,7 +330,7 @@
               </a:lnSpc>
             </a:pPr>
             <a:r>
-              <a:rPr lang="en-US" sz="1300">
+              <a:rPr lang="en-US" sz="1300" noProof="1">
                 <a:solidFill>
                   <a:srgbClr val="818181"/>
                 </a:solidFill>
@@ -313,20 +339,20 @@
               </a:rPr>
               <a:t>Решения для дома и бизнеса</a:t>
             </a:r>
-            <a:endParaRPr lang="en-US" sz="1300"/>
-          </a:p>
-        </p:txBody>
-      </p:sp>
-      <p:sp>
-        <p:nvSpPr>
-          <p:cNvPr id="9" name="meta"/>
+            <a:endParaRPr lang="en-US" sz="1300" noProof="1"/>
+          </a:p>
+        </p:txBody>
+      </p:sp>
+      <p:sp>
+        <p:nvSpPr>
+          <p:cNvPr id="10" name="meta"/>
           <p:cNvSpPr txBox="1"/>
           <p:nvPr/>
         </p:nvSpPr>
         <p:spPr>
           <a:xfrm>
             <a:off x="5842000" y="6070600"/>
-            <a:ext cx="5588000" cy="279400"/>
+            <a:ext cx="4826000" cy="279400"/>
           </a:xfrm>
           <a:prstGeom prst="rect">
             <a:avLst/>
@@ -346,16 +372,16 @@
               </a:lnSpc>
             </a:pPr>
             <a:r>
-              <a:rPr lang="en-US" sz="1200">
+              <a:rPr lang="en-US" sz="1200" noProof="1">
                 <a:solidFill>
                   <a:srgbClr val="B0B0B0"/>
                 </a:solidFill>
                 <a:latin typeface="MiSans"/>
                 <a:ea typeface="MiSans"/>
               </a:rPr>
-              <a:t>Техническая презентация · кейс «Екатеринбург» · v1.0 · 2026</a:t>
-            </a:r>
-            <a:endParaRPr lang="en-US" sz="1200"/>
+              <a:t>Техническая презентация · кейс «Екатеринбург» · 2026</a:t>
+            </a:r>
+            <a:endParaRPr lang="en-US" sz="1200" noProof="1"/>
           </a:p>
         </p:txBody>
       </p:sp>
@@ -423,7 +449,7 @@
               </a:lnSpc>
             </a:pPr>
             <a:r>
-              <a:rPr lang="en-US" sz="1200" b="1" spc="200" kern="0">
+              <a:rPr lang="en-US" sz="1200" noProof="1" b="1" spc="200" kern="0">
                 <a:solidFill>
                   <a:srgbClr val="E50040"/>
                 </a:solidFill>
@@ -432,7 +458,7 @@
               </a:rPr>
               <a:t>СПЕЦИФИКАЦИЯ</a:t>
             </a:r>
-            <a:endParaRPr lang="en-US" sz="1200"/>
+            <a:endParaRPr lang="en-US" sz="1200" noProof="1"/>
           </a:p>
         </p:txBody>
       </p:sp>
@@ -465,7 +491,7 @@
               </a:lnSpc>
             </a:pPr>
             <a:r>
-              <a:rPr lang="en-US" sz="3000" b="1">
+              <a:rPr lang="en-US" sz="3000" noProof="1" b="1">
                 <a:solidFill>
                   <a:srgbClr val="000000"/>
                 </a:solidFill>
@@ -474,7 +500,7 @@
               </a:rPr>
               <a:t>В расчёте — только продукция РЕХАУ</a:t>
             </a:r>
-            <a:endParaRPr lang="en-US" sz="3000"/>
+            <a:endParaRPr lang="en-US" sz="3000" noProof="1"/>
           </a:p>
         </p:txBody>
       </p:sp>
@@ -577,7 +603,7 @@
               </a:lnSpc>
             </a:pPr>
             <a:r>
-              <a:rPr lang="en-US" sz="1800" b="1">
+              <a:rPr lang="en-US" sz="1800" noProof="1" b="1">
                 <a:solidFill>
                   <a:srgbClr val="000000"/>
                 </a:solidFill>
@@ -586,7 +612,7 @@
               </a:rPr>
               <a:t>Трубы RAUTHERM S</a:t>
             </a:r>
-            <a:endParaRPr lang="en-US" sz="1800"/>
+            <a:endParaRPr lang="en-US" sz="1800" noProof="1"/>
           </a:p>
         </p:txBody>
       </p:sp>
@@ -619,7 +645,7 @@
               </a:lnSpc>
             </a:pPr>
             <a:r>
-              <a:rPr lang="en-US" sz="1300">
+              <a:rPr lang="en-US" sz="1300" noProof="1">
                 <a:solidFill>
                   <a:srgbClr val="4E4E4E"/>
                 </a:solidFill>
@@ -628,7 +654,7 @@
               </a:rPr>
               <a:t>Диаметры 17, 20 и 25 мм для нагревательных контуров открытых площадок</a:t>
             </a:r>
-            <a:endParaRPr lang="en-US" sz="1300"/>
+            <a:endParaRPr lang="en-US" sz="1300" noProof="1"/>
           </a:p>
           <a:p>
             <a:pPr algn="l">
@@ -640,7 +666,7 @@
               </a:spcBef>
             </a:pPr>
             <a:r>
-              <a:rPr lang="en-US" sz="1300">
+              <a:rPr lang="en-US" sz="1300" noProof="1">
                 <a:solidFill>
                   <a:srgbClr val="818181"/>
                 </a:solidFill>
@@ -649,7 +675,7 @@
               </a:rPr>
               <a:t>Учитываются реальные диаметры и шероховатость</a:t>
             </a:r>
-            <a:endParaRPr lang="en-US" sz="1300"/>
+            <a:endParaRPr lang="en-US" sz="1300" noProof="1"/>
           </a:p>
         </p:txBody>
       </p:sp>
@@ -730,7 +756,7 @@
               </a:lnSpc>
             </a:pPr>
             <a:r>
-              <a:rPr lang="en-US" sz="1800" b="1">
+              <a:rPr lang="en-US" sz="1800" noProof="1" b="1">
                 <a:solidFill>
                   <a:srgbClr val="000000"/>
                 </a:solidFill>
@@ -739,7 +765,7 @@
               </a:rPr>
               <a:t>Коллекторы HKV-D</a:t>
             </a:r>
-            <a:endParaRPr lang="en-US" sz="1800"/>
+            <a:endParaRPr lang="en-US" sz="1800" noProof="1"/>
           </a:p>
         </p:txBody>
       </p:sp>
@@ -772,7 +798,7 @@
               </a:lnSpc>
             </a:pPr>
             <a:r>
-              <a:rPr lang="en-US" sz="1300">
+              <a:rPr lang="en-US" sz="1300" noProof="1">
                 <a:solidFill>
                   <a:srgbClr val="4E4E4E"/>
                 </a:solidFill>
@@ -781,7 +807,7 @@
               </a:rPr>
               <a:t>Бытовые распределительные коллекторы на 2–12 контуров</a:t>
             </a:r>
-            <a:endParaRPr lang="en-US" sz="1300"/>
+            <a:endParaRPr lang="en-US" sz="1300" noProof="1"/>
           </a:p>
           <a:p>
             <a:pPr algn="l">
@@ -793,7 +819,7 @@
               </a:spcBef>
             </a:pPr>
             <a:r>
-              <a:rPr lang="en-US" sz="1300">
+              <a:rPr lang="en-US" sz="1300" noProof="1">
                 <a:solidFill>
                   <a:srgbClr val="818181"/>
                 </a:solidFill>
@@ -802,7 +828,7 @@
               </a:rPr>
               <a:t>Подбор по Kv и числу контуров — с артикулами</a:t>
             </a:r>
-            <a:endParaRPr lang="en-US" sz="1300"/>
+            <a:endParaRPr lang="en-US" sz="1300" noProof="1"/>
           </a:p>
         </p:txBody>
       </p:sp>
@@ -883,7 +909,7 @@
               </a:lnSpc>
             </a:pPr>
             <a:r>
-              <a:rPr lang="en-US" sz="1600" b="1">
+              <a:rPr lang="en-US" sz="1600" noProof="1" b="1">
                 <a:solidFill>
                   <a:srgbClr val="000000"/>
                 </a:solidFill>
@@ -892,7 +918,7 @@
               </a:rPr>
               <a:t>Промышленные коллекторы IV</a:t>
             </a:r>
-            <a:endParaRPr lang="en-US" sz="1600"/>
+            <a:endParaRPr lang="en-US" sz="1600" noProof="1"/>
           </a:p>
         </p:txBody>
       </p:sp>
@@ -925,7 +951,7 @@
               </a:lnSpc>
             </a:pPr>
             <a:r>
-              <a:rPr lang="en-US" sz="1300">
+              <a:rPr lang="en-US" sz="1300" noProof="1">
                 <a:solidFill>
                   <a:srgbClr val="4E4E4E"/>
                 </a:solidFill>
@@ -934,7 +960,7 @@
               </a:rPr>
               <a:t>IV 1¼" и IV 1½" для крупных площадок и больших расходов</a:t>
             </a:r>
-            <a:endParaRPr lang="en-US" sz="1300"/>
+            <a:endParaRPr lang="en-US" sz="1300" noProof="1"/>
           </a:p>
           <a:p>
             <a:pPr algn="l">
@@ -946,7 +972,7 @@
               </a:spcBef>
             </a:pPr>
             <a:r>
-              <a:rPr lang="en-US" sz="1300">
+              <a:rPr lang="en-US" sz="1300" noProof="1">
                 <a:solidFill>
                   <a:srgbClr val="818181"/>
                 </a:solidFill>
@@ -955,7 +981,7 @@
               </a:rPr>
               <a:t>Автоматический выбор типоразмера по нагрузке</a:t>
             </a:r>
-            <a:endParaRPr lang="en-US" sz="1300"/>
+            <a:endParaRPr lang="en-US" sz="1300" noProof="1"/>
           </a:p>
         </p:txBody>
       </p:sp>
@@ -1012,7 +1038,7 @@
               </a:lnSpc>
             </a:pPr>
             <a:r>
-              <a:rPr lang="en-US" sz="1400" b="1">
+              <a:rPr lang="en-US" sz="1400" noProof="1" b="1">
                 <a:solidFill>
                   <a:srgbClr val="000000"/>
                 </a:solidFill>
@@ -1022,7 +1048,7 @@
               <a:t>Спецификация формируется с артикулами РЕХАУ</a:t>
             </a:r>
             <a:r>
-              <a:rPr lang="en-US" sz="1400">
+              <a:rPr lang="en-US" sz="1400" noProof="1">
                 <a:solidFill>
                   <a:srgbClr val="000000"/>
                 </a:solidFill>
@@ -1031,7 +1057,7 @@
               </a:rPr>
               <a:t> — из расчёта сразу понятно, что заказывать</a:t>
             </a:r>
-            <a:endParaRPr lang="en-US" sz="1400"/>
+            <a:endParaRPr lang="en-US" sz="1400" noProof="1"/>
           </a:p>
         </p:txBody>
       </p:sp>
@@ -1090,7 +1116,7 @@
               </a:lnSpc>
             </a:pPr>
             <a:r>
-              <a:rPr lang="en-US" sz="1100">
+              <a:rPr lang="en-US" sz="1100" noProof="1">
                 <a:solidFill>
                   <a:srgbClr val="818181"/>
                 </a:solidFill>
@@ -1099,7 +1125,7 @@
               </a:rPr>
               <a:t>10</a:t>
             </a:r>
-            <a:endParaRPr lang="en-US" sz="1100"/>
+            <a:endParaRPr lang="en-US" sz="1100" noProof="1"/>
           </a:p>
         </p:txBody>
       </p:sp>
@@ -1167,7 +1193,7 @@
               </a:lnSpc>
             </a:pPr>
             <a:r>
-              <a:rPr lang="en-US" sz="1200" b="1" spc="200" kern="0">
+              <a:rPr lang="en-US" sz="1200" noProof="1" b="1" spc="200" kern="0">
                 <a:solidFill>
                   <a:srgbClr val="E50040"/>
                 </a:solidFill>
@@ -1176,7 +1202,7 @@
               </a:rPr>
               <a:t>КЕЙС · «ЕКАТЕРИНБУРГ, ОБОГРЕВ НАРУЖНЫХ ПОВЕРХНОСТЕЙ»</a:t>
             </a:r>
-            <a:endParaRPr lang="en-US" sz="1200"/>
+            <a:endParaRPr lang="en-US" sz="1200" noProof="1"/>
           </a:p>
         </p:txBody>
       </p:sp>
@@ -1209,7 +1235,7 @@
               </a:lnSpc>
             </a:pPr>
             <a:r>
-              <a:rPr lang="en-US" sz="3000" b="1">
+              <a:rPr lang="en-US" sz="3000" noProof="1" b="1">
                 <a:solidFill>
                   <a:srgbClr val="000000"/>
                 </a:solidFill>
@@ -1218,7 +1244,7 @@
               </a:rPr>
               <a:t>Весь расчёт — на одном экране</a:t>
             </a:r>
-            <a:endParaRPr lang="en-US" sz="3000"/>
+            <a:endParaRPr lang="en-US" sz="3000" noProof="1"/>
           </a:p>
         </p:txBody>
       </p:sp>
@@ -1299,16 +1325,16 @@
               </a:lnSpc>
             </a:pPr>
             <a:r>
-              <a:rPr lang="en-US" sz="3200" b="1">
+              <a:rPr lang="en-US" sz="3200" noProof="1" b="1">
                 <a:solidFill>
                   <a:srgbClr val="E50040"/>
                 </a:solidFill>
                 <a:latin typeface="MiSans"/>
                 <a:ea typeface="MiSans"/>
               </a:rPr>
-              <a:t>55,8</a:t>
-            </a:r>
-            <a:endParaRPr lang="en-US" sz="3200"/>
+              <a:t>96,8</a:t>
+            </a:r>
+            <a:endParaRPr lang="en-US" sz="3200" noProof="1"/>
           </a:p>
         </p:txBody>
       </p:sp>
@@ -1341,7 +1367,7 @@
               </a:lnSpc>
             </a:pPr>
             <a:r>
-              <a:rPr lang="en-US" sz="1300">
+              <a:rPr lang="en-US" sz="1300" noProof="1">
                 <a:solidFill>
                   <a:srgbClr val="818181"/>
                 </a:solidFill>
@@ -1350,7 +1376,7 @@
               </a:rPr>
               <a:t>кВт — тепловая мощность системы</a:t>
             </a:r>
-            <a:endParaRPr lang="en-US" sz="1300"/>
+            <a:endParaRPr lang="en-US" sz="1300" noProof="1"/>
           </a:p>
         </p:txBody>
       </p:sp>
@@ -1409,7 +1435,7 @@
               </a:lnSpc>
             </a:pPr>
             <a:r>
-              <a:rPr lang="en-US" sz="3200" b="1">
+              <a:rPr lang="en-US" sz="3200" noProof="1" b="1">
                 <a:solidFill>
                   <a:srgbClr val="E50040"/>
                 </a:solidFill>
@@ -1418,7 +1444,7 @@
               </a:rPr>
               <a:t>920</a:t>
             </a:r>
-            <a:endParaRPr lang="en-US" sz="3200"/>
+            <a:endParaRPr lang="en-US" sz="3200" noProof="1"/>
           </a:p>
         </p:txBody>
       </p:sp>
@@ -1451,7 +1477,7 @@
               </a:lnSpc>
             </a:pPr>
             <a:r>
-              <a:rPr lang="en-US" sz="1300">
+              <a:rPr lang="en-US" sz="1300" noProof="1">
                 <a:solidFill>
                   <a:srgbClr val="818181"/>
                 </a:solidFill>
@@ -1460,7 +1486,7 @@
               </a:rPr>
               <a:t>м — труба RAUTHERM S 20×2,0</a:t>
             </a:r>
-            <a:endParaRPr lang="en-US" sz="1300"/>
+            <a:endParaRPr lang="en-US" sz="1300" noProof="1"/>
           </a:p>
         </p:txBody>
       </p:sp>
@@ -1519,16 +1545,16 @@
               </a:lnSpc>
             </a:pPr>
             <a:r>
-              <a:rPr lang="en-US" sz="3200" b="1">
+              <a:rPr lang="en-US" sz="3200" noProof="1" b="1">
                 <a:solidFill>
                   <a:srgbClr val="E50040"/>
                 </a:solidFill>
                 <a:latin typeface="MiSans"/>
                 <a:ea typeface="MiSans"/>
               </a:rPr>
-              <a:t>2,66</a:t>
-            </a:r>
-            <a:endParaRPr lang="en-US" sz="3200"/>
+              <a:t>4,61</a:t>
+            </a:r>
+            <a:endParaRPr lang="en-US" sz="3200" noProof="1"/>
           </a:p>
         </p:txBody>
       </p:sp>
@@ -1561,7 +1587,7 @@
               </a:lnSpc>
             </a:pPr>
             <a:r>
-              <a:rPr lang="en-US" sz="1300">
+              <a:rPr lang="en-US" sz="1300" noProof="1">
                 <a:solidFill>
                   <a:srgbClr val="818181"/>
                 </a:solidFill>
@@ -1570,7 +1596,7 @@
               </a:rPr>
               <a:t>м³/ч — расход насоса</a:t>
             </a:r>
-            <a:endParaRPr lang="en-US" sz="1300"/>
+            <a:endParaRPr lang="en-US" sz="1300" noProof="1"/>
           </a:p>
         </p:txBody>
       </p:sp>
@@ -1629,16 +1655,16 @@
               </a:lnSpc>
             </a:pPr>
             <a:r>
-              <a:rPr lang="en-US" sz="3200" b="1">
+              <a:rPr lang="en-US" sz="3200" noProof="1" b="1">
                 <a:solidFill>
                   <a:srgbClr val="E50040"/>
                 </a:solidFill>
                 <a:latin typeface="MiSans"/>
                 <a:ea typeface="MiSans"/>
               </a:rPr>
-              <a:t>29,2</a:t>
-            </a:r>
-            <a:endParaRPr lang="en-US" sz="3200"/>
+              <a:t>46</a:t>
+            </a:r>
+            <a:endParaRPr lang="en-US" sz="3200" noProof="1"/>
           </a:p>
         </p:txBody>
       </p:sp>
@@ -1671,7 +1697,7 @@
               </a:lnSpc>
             </a:pPr>
             <a:r>
-              <a:rPr lang="en-US" sz="1300">
+              <a:rPr lang="en-US" sz="1300" noProof="1">
                 <a:solidFill>
                   <a:srgbClr val="818181"/>
                 </a:solidFill>
@@ -1680,7 +1706,7 @@
               </a:rPr>
               <a:t>кПа — напор насоса</a:t>
             </a:r>
-            <a:endParaRPr lang="en-US" sz="1300"/>
+            <a:endParaRPr lang="en-US" sz="1300" noProof="1"/>
           </a:p>
         </p:txBody>
       </p:sp>
@@ -1739,7 +1765,7 @@
               </a:lnSpc>
             </a:pPr>
             <a:r>
-              <a:rPr lang="en-US" sz="2200" b="1">
+              <a:rPr lang="en-US" sz="2200" noProof="1" b="1">
                 <a:solidFill>
                   <a:srgbClr val="000000"/>
                 </a:solidFill>
@@ -1748,7 +1774,7 @@
               </a:rPr>
               <a:t>53,0 / 37,4 °C</a:t>
             </a:r>
-            <a:endParaRPr lang="en-US" sz="2200"/>
+            <a:endParaRPr lang="en-US" sz="2200" noProof="1"/>
           </a:p>
         </p:txBody>
       </p:sp>
@@ -1781,7 +1807,7 @@
               </a:lnSpc>
             </a:pPr>
             <a:r>
-              <a:rPr lang="en-US" sz="1200">
+              <a:rPr lang="en-US" sz="1200" noProof="1">
                 <a:solidFill>
                   <a:srgbClr val="818181"/>
                 </a:solidFill>
@@ -1790,7 +1816,7 @@
               </a:rPr>
               <a:t>подача / обратка</a:t>
             </a:r>
-            <a:endParaRPr lang="en-US" sz="1200"/>
+            <a:endParaRPr lang="en-US" sz="1200" noProof="1"/>
           </a:p>
         </p:txBody>
       </p:sp>
@@ -1849,7 +1875,7 @@
               </a:lnSpc>
             </a:pPr>
             <a:r>
-              <a:rPr lang="en-US" sz="2200" b="1">
+              <a:rPr lang="en-US" sz="2200" noProof="1" b="1">
                 <a:solidFill>
                   <a:srgbClr val="000000"/>
                 </a:solidFill>
@@ -1858,7 +1884,7 @@
               </a:rPr>
               <a:t>4 коллектора</a:t>
             </a:r>
-            <a:endParaRPr lang="en-US" sz="2200"/>
+            <a:endParaRPr lang="en-US" sz="2200" noProof="1"/>
           </a:p>
         </p:txBody>
       </p:sp>
@@ -1891,16 +1917,16 @@
               </a:lnSpc>
             </a:pPr>
             <a:r>
-              <a:rPr lang="en-US" sz="1200">
+              <a:rPr lang="en-US" sz="1200" noProof="1">
                 <a:solidFill>
                   <a:srgbClr val="818181"/>
                 </a:solidFill>
                 <a:latin typeface="MiSans"/>
                 <a:ea typeface="MiSans"/>
               </a:rPr>
-              <a:t>IV 1¼" и HKV-D, 18 контуров</a:t>
-            </a:r>
-            <a:endParaRPr lang="en-US" sz="1200"/>
+              <a:t>IV 1¼" и HKV-D, 19 контуров</a:t>
+            </a:r>
+            <a:endParaRPr lang="en-US" sz="1200" noProof="1"/>
           </a:p>
         </p:txBody>
       </p:sp>
@@ -1959,7 +1985,7 @@
               </a:lnSpc>
             </a:pPr>
             <a:r>
-              <a:rPr lang="en-US" sz="2200" b="1">
+              <a:rPr lang="en-US" sz="2200" noProof="1" b="1">
                 <a:solidFill>
                   <a:srgbClr val="000000"/>
                 </a:solidFill>
@@ -1968,7 +1994,7 @@
               </a:rPr>
               <a:t>335,4 Вт/м²</a:t>
             </a:r>
-            <a:endParaRPr lang="en-US" sz="2200"/>
+            <a:endParaRPr lang="en-US" sz="2200" noProof="1"/>
           </a:p>
         </p:txBody>
       </p:sp>
@@ -2001,7 +2027,7 @@
               </a:lnSpc>
             </a:pPr>
             <a:r>
-              <a:rPr lang="en-US" sz="1200">
+              <a:rPr lang="en-US" sz="1200" noProof="1">
                 <a:solidFill>
                   <a:srgbClr val="818181"/>
                 </a:solidFill>
@@ -2010,7 +2036,7 @@
               </a:rPr>
               <a:t>суммарная удельная мощность</a:t>
             </a:r>
-            <a:endParaRPr lang="en-US" sz="1200"/>
+            <a:endParaRPr lang="en-US" sz="1200" noProof="1"/>
           </a:p>
         </p:txBody>
       </p:sp>
@@ -2069,16 +2095,16 @@
               </a:lnSpc>
             </a:pPr>
             <a:r>
-              <a:rPr lang="en-US" sz="2200" b="1">
+              <a:rPr lang="en-US" sz="2200" noProof="1" b="1">
                 <a:solidFill>
                   <a:srgbClr val="000000"/>
                 </a:solidFill>
                 <a:latin typeface="MiSans"/>
                 <a:ea typeface="MiSans"/>
               </a:rPr>
-              <a:t>7,5 л</a:t>
-            </a:r>
-            <a:endParaRPr lang="en-US" sz="2200"/>
+              <a:t>16 л</a:t>
+            </a:r>
+            <a:endParaRPr lang="en-US" sz="2200" noProof="1"/>
           </a:p>
         </p:txBody>
       </p:sp>
@@ -2111,7 +2137,7 @@
               </a:lnSpc>
             </a:pPr>
             <a:r>
-              <a:rPr lang="en-US" sz="1200">
+              <a:rPr lang="en-US" sz="1200" noProof="1">
                 <a:solidFill>
                   <a:srgbClr val="818181"/>
                 </a:solidFill>
@@ -2120,7 +2146,7 @@
               </a:rPr>
               <a:t>расширительный бак</a:t>
             </a:r>
-            <a:endParaRPr lang="en-US" sz="1200"/>
+            <a:endParaRPr lang="en-US" sz="1200" noProof="1"/>
           </a:p>
         </p:txBody>
       </p:sp>
@@ -2177,7 +2203,7 @@
               </a:lnSpc>
             </a:pPr>
             <a:r>
-              <a:rPr lang="en-US" sz="1400" b="1">
+              <a:rPr lang="en-US" sz="1400" noProof="1" b="1">
                 <a:solidFill>
                   <a:srgbClr val="000000"/>
                 </a:solidFill>
@@ -2187,7 +2213,7 @@
               <a:t>Итог для объекта:</a:t>
             </a:r>
             <a:r>
-              <a:rPr lang="en-US" sz="1400">
+              <a:rPr lang="en-US" sz="1400" noProof="1">
                 <a:solidFill>
                   <a:srgbClr val="000000"/>
                 </a:solidFill>
@@ -2196,7 +2222,7 @@
               </a:rPr>
               <a:t> полная спецификация оборудования и гидравлики сформирована автоматически и готова к выгрузке в PDF</a:t>
             </a:r>
-            <a:endParaRPr lang="en-US" sz="1400"/>
+            <a:endParaRPr lang="en-US" sz="1400" noProof="1"/>
           </a:p>
         </p:txBody>
       </p:sp>
@@ -2255,7 +2281,7 @@
               </a:lnSpc>
             </a:pPr>
             <a:r>
-              <a:rPr lang="en-US" sz="1100">
+              <a:rPr lang="en-US" sz="1100" noProof="1">
                 <a:solidFill>
                   <a:srgbClr val="818181"/>
                 </a:solidFill>
@@ -2264,7 +2290,7 @@
               </a:rPr>
               <a:t>11</a:t>
             </a:r>
-            <a:endParaRPr lang="en-US" sz="1100"/>
+            <a:endParaRPr lang="en-US" sz="1100" noProof="1"/>
           </a:p>
         </p:txBody>
       </p:sp>
@@ -2332,7 +2358,7 @@
               </a:lnSpc>
             </a:pPr>
             <a:r>
-              <a:rPr lang="en-US" sz="1200" b="1" spc="200" kern="0">
+              <a:rPr lang="en-US" sz="1200" noProof="1" b="1" spc="200" kern="0">
                 <a:solidFill>
                   <a:srgbClr val="E50040"/>
                 </a:solidFill>
@@ -2341,7 +2367,7 @@
               </a:rPr>
               <a:t>ВЫХОДНОЙ ДОКУМЕНТ</a:t>
             </a:r>
-            <a:endParaRPr lang="en-US" sz="1200"/>
+            <a:endParaRPr lang="en-US" sz="1200" noProof="1"/>
           </a:p>
         </p:txBody>
       </p:sp>
@@ -2374,7 +2400,7 @@
               </a:lnSpc>
             </a:pPr>
             <a:r>
-              <a:rPr lang="en-US" sz="3000" b="1">
+              <a:rPr lang="en-US" sz="3000" noProof="1" b="1">
                 <a:solidFill>
                   <a:srgbClr val="000000"/>
                 </a:solidFill>
@@ -2383,7 +2409,7 @@
               </a:rPr>
               <a:t>Отчёт в PDF — в один клик</a:t>
             </a:r>
-            <a:endParaRPr lang="en-US" sz="3000"/>
+            <a:endParaRPr lang="en-US" sz="3000" noProof="1"/>
           </a:p>
         </p:txBody>
       </p:sp>
@@ -2493,7 +2519,7 @@
               </a:lnSpc>
             </a:pPr>
             <a:r>
-              <a:rPr lang="en-US" sz="1100">
+              <a:rPr lang="en-US" sz="1100" noProof="1">
                 <a:solidFill>
                   <a:srgbClr val="818181"/>
                 </a:solidFill>
@@ -2502,7 +2528,7 @@
               </a:rPr>
               <a:t>Первая страница отчёта — проект 9-100000</a:t>
             </a:r>
-            <a:endParaRPr lang="en-US" sz="1100"/>
+            <a:endParaRPr lang="en-US" sz="1100" noProof="1"/>
           </a:p>
         </p:txBody>
       </p:sp>
@@ -2557,7 +2583,7 @@
               </a:lnSpc>
             </a:pPr>
             <a:r>
-              <a:rPr lang="en-US" sz="1400" b="1">
+              <a:rPr lang="en-US" sz="1400" noProof="1" b="1">
                 <a:solidFill>
                   <a:srgbClr val="4E4E4E"/>
                 </a:solidFill>
@@ -2567,7 +2593,7 @@
               <a:t>КПИ и исходные данные</a:t>
             </a:r>
             <a:r>
-              <a:rPr lang="en-US" sz="1400">
+              <a:rPr lang="en-US" sz="1400" noProof="1">
                 <a:solidFill>
                   <a:srgbClr val="4E4E4E"/>
                 </a:solidFill>
@@ -2576,7 +2602,7 @@
               </a:rPr>
               <a:t> — мощность, насос, климат, конструкция, теплоноситель</a:t>
             </a:r>
-            <a:endParaRPr lang="en-US" sz="1400"/>
+            <a:endParaRPr lang="en-US" sz="1400" noProof="1"/>
           </a:p>
         </p:txBody>
       </p:sp>
@@ -2631,7 +2657,7 @@
               </a:lnSpc>
             </a:pPr>
             <a:r>
-              <a:rPr lang="en-US" sz="1400" b="1">
+              <a:rPr lang="en-US" sz="1400" noProof="1" b="1">
                 <a:solidFill>
                   <a:srgbClr val="4E4E4E"/>
                 </a:solidFill>
@@ -2641,7 +2667,7 @@
               <a:t>Ведомость оборудования и слои «пирога»</a:t>
             </a:r>
             <a:r>
-              <a:rPr lang="en-US" sz="1400">
+              <a:rPr lang="en-US" sz="1400" noProof="1">
                 <a:solidFill>
                   <a:srgbClr val="4E4E4E"/>
                 </a:solidFill>
@@ -2650,7 +2676,7 @@
               </a:rPr>
               <a:t> — материалы, толщины, λ, R</a:t>
             </a:r>
-            <a:endParaRPr lang="en-US" sz="1400"/>
+            <a:endParaRPr lang="en-US" sz="1400" noProof="1"/>
           </a:p>
         </p:txBody>
       </p:sp>
@@ -2705,7 +2731,7 @@
               </a:lnSpc>
             </a:pPr>
             <a:r>
-              <a:rPr lang="en-US" sz="1400" b="1">
+              <a:rPr lang="en-US" sz="1400" noProof="1" b="1">
                 <a:solidFill>
                   <a:srgbClr val="4E4E4E"/>
                 </a:solidFill>
@@ -2715,7 +2741,7 @@
               <a:t>Приложение по гидравлике</a:t>
             </a:r>
             <a:r>
-              <a:rPr lang="en-US" sz="1400">
+              <a:rPr lang="en-US" sz="1400" noProof="1">
                 <a:solidFill>
                   <a:srgbClr val="4E4E4E"/>
                 </a:solidFill>
@@ -2724,7 +2750,7 @@
               </a:rPr>
               <a:t> — таблица каждого контура: расход, ΔP, дросселирование, обороты</a:t>
             </a:r>
-            <a:endParaRPr lang="en-US" sz="1400"/>
+            <a:endParaRPr lang="en-US" sz="1400" noProof="1"/>
           </a:p>
         </p:txBody>
       </p:sp>
@@ -2779,7 +2805,7 @@
               </a:lnSpc>
             </a:pPr>
             <a:r>
-              <a:rPr lang="en-US" sz="1400" b="1">
+              <a:rPr lang="en-US" sz="1400" noProof="1" b="1">
                 <a:solidFill>
                   <a:srgbClr val="4E4E4E"/>
                 </a:solidFill>
@@ -2789,7 +2815,7 @@
               <a:t>Брендированный документ</a:t>
             </a:r>
             <a:r>
-              <a:rPr lang="en-US" sz="1400">
+              <a:rPr lang="en-US" sz="1400" noProof="1">
                 <a:solidFill>
                   <a:srgbClr val="4E4E4E"/>
                 </a:solidFill>
@@ -2798,7 +2824,7 @@
               </a:rPr>
               <a:t> — шапка РЕХАУ, нумерация, дата, готов к передаче заказчику</a:t>
             </a:r>
-            <a:endParaRPr lang="en-US" sz="1400"/>
+            <a:endParaRPr lang="en-US" sz="1400" noProof="1"/>
           </a:p>
         </p:txBody>
       </p:sp>
@@ -2857,7 +2883,7 @@
               </a:lnSpc>
             </a:pPr>
             <a:r>
-              <a:rPr lang="en-US" sz="1100">
+              <a:rPr lang="en-US" sz="1100" noProof="1">
                 <a:solidFill>
                   <a:srgbClr val="818181"/>
                 </a:solidFill>
@@ -2866,7 +2892,7 @@
               </a:rPr>
               <a:t>Кнопки на экране результатов: предпросмотр, печать, сохранение</a:t>
             </a:r>
-            <a:endParaRPr lang="en-US" sz="1100"/>
+            <a:endParaRPr lang="en-US" sz="1100" noProof="1"/>
           </a:p>
         </p:txBody>
       </p:sp>
@@ -2925,7 +2951,7 @@
               </a:lnSpc>
             </a:pPr>
             <a:r>
-              <a:rPr lang="en-US" sz="1100">
+              <a:rPr lang="en-US" sz="1100" noProof="1">
                 <a:solidFill>
                   <a:srgbClr val="818181"/>
                 </a:solidFill>
@@ -2934,7 +2960,7 @@
               </a:rPr>
               <a:t>12</a:t>
             </a:r>
-            <a:endParaRPr lang="en-US" sz="1100"/>
+            <a:endParaRPr lang="en-US" sz="1100" noProof="1"/>
           </a:p>
         </p:txBody>
       </p:sp>
@@ -3002,7 +3028,7 @@
               </a:lnSpc>
             </a:pPr>
             <a:r>
-              <a:rPr lang="en-US" sz="1200" b="1" spc="200" kern="0">
+              <a:rPr lang="en-US" sz="1200" noProof="1" b="1" spc="200" kern="0">
                 <a:solidFill>
                   <a:srgbClr val="E50040"/>
                 </a:solidFill>
@@ -3011,7 +3037,7 @@
               </a:rPr>
               <a:t>РАЗВИТИЕ</a:t>
             </a:r>
-            <a:endParaRPr lang="en-US" sz="1200"/>
+            <a:endParaRPr lang="en-US" sz="1200" noProof="1"/>
           </a:p>
         </p:txBody>
       </p:sp>
@@ -3044,7 +3070,7 @@
               </a:lnSpc>
             </a:pPr>
             <a:r>
-              <a:rPr lang="en-US" sz="3000" b="1">
+              <a:rPr lang="en-US" sz="3000" noProof="1" b="1">
                 <a:solidFill>
                   <a:srgbClr val="000000"/>
                 </a:solidFill>
@@ -3053,7 +3079,7 @@
               </a:rPr>
               <a:t>Что уже есть и что дальше</a:t>
             </a:r>
-            <a:endParaRPr lang="en-US" sz="3000"/>
+            <a:endParaRPr lang="en-US" sz="3000" noProof="1"/>
           </a:p>
         </p:txBody>
       </p:sp>
@@ -3132,7 +3158,7 @@
               </a:lnSpc>
             </a:pPr>
             <a:r>
-              <a:rPr lang="en-US" sz="1600" b="1">
+              <a:rPr lang="en-US" sz="1600" noProof="1" b="1">
                 <a:solidFill>
                   <a:srgbClr val="000000"/>
                 </a:solidFill>
@@ -3141,7 +3167,7 @@
               </a:rPr>
               <a:t>Реализовано</a:t>
             </a:r>
-            <a:endParaRPr lang="en-US" sz="1600"/>
+            <a:endParaRPr lang="en-US" sz="1600" noProof="1"/>
           </a:p>
         </p:txBody>
       </p:sp>
@@ -3154,7 +3180,7 @@
         <p:spPr>
           <a:xfrm>
             <a:off x="762000" y="2565400"/>
-            <a:ext cx="3467100" cy="2921000"/>
+            <a:ext cx="3467100" cy="3327400"/>
           </a:xfrm>
           <a:prstGeom prst="roundRect">
             <a:avLst>
@@ -3179,8 +3205,8 @@
         </p:nvSpPr>
         <p:spPr>
           <a:xfrm>
-            <a:off x="1041400" y="2794000"/>
-            <a:ext cx="2921000" cy="2540000"/>
+            <a:off x="1041400" y="2743200"/>
+            <a:ext cx="2921000" cy="2946400"/>
           </a:xfrm>
           <a:prstGeom prst="rect">
             <a:avLst/>
@@ -3196,11 +3222,11 @@
           <a:p>
             <a:pPr algn="l">
               <a:lnSpc>
-                <a:spcPct val="150000"/>
-              </a:lnSpc>
-            </a:pPr>
-            <a:r>
-              <a:rPr lang="en-US" sz="1300">
+                <a:spcPct val="140000"/>
+              </a:lnSpc>
+            </a:pPr>
+            <a:r>
+              <a:rPr lang="en-US" sz="1300" noProof="1">
                 <a:solidFill>
                   <a:srgbClr val="4E4E4E"/>
                 </a:solidFill>
@@ -3209,19 +3235,19 @@
               </a:rPr>
               <a:t>Климат: 550 городов по СП 131.13330.2025</a:t>
             </a:r>
-            <a:endParaRPr lang="en-US" sz="1300"/>
-          </a:p>
-          <a:p>
-            <a:pPr algn="l">
-              <a:lnSpc>
-                <a:spcPct val="150000"/>
+            <a:endParaRPr lang="en-US" sz="1300" noProof="1"/>
+          </a:p>
+          <a:p>
+            <a:pPr algn="l">
+              <a:lnSpc>
+                <a:spcPct val="140000"/>
               </a:lnSpc>
               <a:spcBef>
                 <a:spcPts val="800"/>
               </a:spcBef>
             </a:pPr>
             <a:r>
-              <a:rPr lang="en-US" sz="1300">
+              <a:rPr lang="en-US" sz="1300" noProof="1">
                 <a:solidFill>
                   <a:srgbClr val="4E4E4E"/>
                 </a:solidFill>
@@ -3230,19 +3256,19 @@
               </a:rPr>
               <a:t>Конструкция с визуализацией «пирога»</a:t>
             </a:r>
-            <a:endParaRPr lang="en-US" sz="1300"/>
-          </a:p>
-          <a:p>
-            <a:pPr algn="l">
-              <a:lnSpc>
-                <a:spcPct val="150000"/>
+            <a:endParaRPr lang="en-US" sz="1300" noProof="1"/>
+          </a:p>
+          <a:p>
+            <a:pPr algn="l">
+              <a:lnSpc>
+                <a:spcPct val="140000"/>
               </a:lnSpc>
               <a:spcBef>
                 <a:spcPts val="800"/>
               </a:spcBef>
             </a:pPr>
             <a:r>
-              <a:rPr lang="en-US" sz="1300">
+              <a:rPr lang="en-US" sz="1300" noProof="1">
                 <a:solidFill>
                   <a:srgbClr val="4E4E4E"/>
                 </a:solidFill>
@@ -3251,19 +3277,19 @@
               </a:rPr>
               <a:t>Тепловой расчёт (режимы Melting)</a:t>
             </a:r>
-            <a:endParaRPr lang="en-US" sz="1300"/>
-          </a:p>
-          <a:p>
-            <a:pPr algn="l">
-              <a:lnSpc>
-                <a:spcPct val="150000"/>
+            <a:endParaRPr lang="en-US" sz="1300" noProof="1"/>
+          </a:p>
+          <a:p>
+            <a:pPr algn="l">
+              <a:lnSpc>
+                <a:spcPct val="140000"/>
               </a:lnSpc>
               <a:spcBef>
                 <a:spcPts val="800"/>
               </a:spcBef>
             </a:pPr>
             <a:r>
-              <a:rPr lang="en-US" sz="1300">
+              <a:rPr lang="en-US" sz="1300" noProof="1">
                 <a:solidFill>
                   <a:srgbClr val="4E4E4E"/>
                 </a:solidFill>
@@ -3272,19 +3298,19 @@
               </a:rPr>
               <a:t>Гидравлика с балансировкой по VDI 2075</a:t>
             </a:r>
-            <a:endParaRPr lang="en-US" sz="1300"/>
-          </a:p>
-          <a:p>
-            <a:pPr algn="l">
-              <a:lnSpc>
-                <a:spcPct val="150000"/>
+            <a:endParaRPr lang="en-US" sz="1300" noProof="1"/>
+          </a:p>
+          <a:p>
+            <a:pPr algn="l">
+              <a:lnSpc>
+                <a:spcPct val="140000"/>
               </a:lnSpc>
               <a:spcBef>
                 <a:spcPts val="800"/>
               </a:spcBef>
             </a:pPr>
             <a:r>
-              <a:rPr lang="en-US" sz="1300">
+              <a:rPr lang="en-US" sz="1300" noProof="1">
                 <a:solidFill>
                   <a:srgbClr val="4E4E4E"/>
                 </a:solidFill>
@@ -3293,7 +3319,7 @@
               </a:rPr>
               <a:t>PDF-отчёт с приложением по контурам</a:t>
             </a:r>
-            <a:endParaRPr lang="en-US" sz="1300"/>
+            <a:endParaRPr lang="en-US" sz="1300" noProof="1"/>
           </a:p>
         </p:txBody>
       </p:sp>
@@ -3350,7 +3376,7 @@
               </a:lnSpc>
             </a:pPr>
             <a:r>
-              <a:rPr lang="en-US" sz="1600" b="1">
+              <a:rPr lang="en-US" sz="1600" noProof="1" b="1">
                 <a:solidFill>
                   <a:srgbClr val="FFFFFF"/>
                 </a:solidFill>
@@ -3359,7 +3385,7 @@
               </a:rPr>
               <a:t>В работе</a:t>
             </a:r>
-            <a:endParaRPr lang="en-US" sz="1600"/>
+            <a:endParaRPr lang="en-US" sz="1600" noProof="1"/>
           </a:p>
         </p:txBody>
       </p:sp>
@@ -3372,7 +3398,7 @@
         <p:spPr>
           <a:xfrm>
             <a:off x="4483100" y="2565400"/>
-            <a:ext cx="3467100" cy="2921000"/>
+            <a:ext cx="3467100" cy="3327400"/>
           </a:xfrm>
           <a:prstGeom prst="roundRect">
             <a:avLst>
@@ -3397,8 +3423,8 @@
         </p:nvSpPr>
         <p:spPr>
           <a:xfrm>
-            <a:off x="4762500" y="2794000"/>
-            <a:ext cx="2921000" cy="2540000"/>
+            <a:off x="4762500" y="2743200"/>
+            <a:ext cx="2921000" cy="2946400"/>
           </a:xfrm>
           <a:prstGeom prst="rect">
             <a:avLst/>
@@ -3414,11 +3440,11 @@
           <a:p>
             <a:pPr algn="l">
               <a:lnSpc>
-                <a:spcPct val="150000"/>
-              </a:lnSpc>
-            </a:pPr>
-            <a:r>
-              <a:rPr lang="en-US" sz="1300">
+                <a:spcPct val="140000"/>
+              </a:lnSpc>
+            </a:pPr>
+            <a:r>
+              <a:rPr lang="en-US" sz="1300" noProof="1">
                 <a:solidFill>
                   <a:srgbClr val="4E4E4E"/>
                 </a:solidFill>
@@ -3427,19 +3453,19 @@
               </a:rPr>
               <a:t>Рабочий и холодный режимы гидравлики — выгрузка в .md</a:t>
             </a:r>
-            <a:endParaRPr lang="en-US" sz="1300"/>
-          </a:p>
-          <a:p>
-            <a:pPr algn="l">
-              <a:lnSpc>
-                <a:spcPct val="150000"/>
+            <a:endParaRPr lang="en-US" sz="1300" noProof="1"/>
+          </a:p>
+          <a:p>
+            <a:pPr algn="l">
+              <a:lnSpc>
+                <a:spcPct val="140000"/>
               </a:lnSpc>
               <a:spcBef>
                 <a:spcPts val="800"/>
               </a:spcBef>
             </a:pPr>
             <a:r>
-              <a:rPr lang="en-US" sz="1300">
+              <a:rPr lang="en-US" sz="1300" noProof="1">
                 <a:solidFill>
                   <a:srgbClr val="4E4E4E"/>
                 </a:solidFill>
@@ -3448,7 +3474,7 @@
               </a:rPr>
               <a:t>Полные формулы расчёта в составе PDF-отчёта</a:t>
             </a:r>
-            <a:endParaRPr lang="en-US" sz="1300"/>
+            <a:endParaRPr lang="en-US" sz="1300" noProof="1"/>
           </a:p>
         </p:txBody>
       </p:sp>
@@ -3505,7 +3531,7 @@
               </a:lnSpc>
             </a:pPr>
             <a:r>
-              <a:rPr lang="en-US" sz="1600" b="1">
+              <a:rPr lang="en-US" sz="1600" noProof="1" b="1">
                 <a:solidFill>
                   <a:srgbClr val="FFFFFF"/>
                 </a:solidFill>
@@ -3514,7 +3540,7 @@
               </a:rPr>
               <a:t>Далее</a:t>
             </a:r>
-            <a:endParaRPr lang="en-US" sz="1600"/>
+            <a:endParaRPr lang="en-US" sz="1600" noProof="1"/>
           </a:p>
         </p:txBody>
       </p:sp>
@@ -3527,7 +3553,7 @@
         <p:spPr>
           <a:xfrm>
             <a:off x="8204200" y="2565400"/>
-            <a:ext cx="3479800" cy="2921000"/>
+            <a:ext cx="3479800" cy="3327400"/>
           </a:xfrm>
           <a:prstGeom prst="roundRect">
             <a:avLst>
@@ -3552,8 +3578,8 @@
         </p:nvSpPr>
         <p:spPr>
           <a:xfrm>
-            <a:off x="8483600" y="2794000"/>
-            <a:ext cx="2946400" cy="2540000"/>
+            <a:off x="8483600" y="2743200"/>
+            <a:ext cx="2946400" cy="2946400"/>
           </a:xfrm>
           <a:prstGeom prst="rect">
             <a:avLst/>
@@ -3569,11 +3595,11 @@
           <a:p>
             <a:pPr algn="l">
               <a:lnSpc>
-                <a:spcPct val="150000"/>
-              </a:lnSpc>
-            </a:pPr>
-            <a:r>
-              <a:rPr lang="en-US" sz="1300">
+                <a:spcPct val="140000"/>
+              </a:lnSpc>
+            </a:pPr>
+            <a:r>
+              <a:rPr lang="en-US" sz="1300" noProof="1">
                 <a:solidFill>
                   <a:srgbClr val="4E4E4E"/>
                 </a:solidFill>
@@ -3582,19 +3608,19 @@
               </a:rPr>
               <a:t>Экспорт отчётов Word и Excel</a:t>
             </a:r>
-            <a:endParaRPr lang="en-US" sz="1300"/>
-          </a:p>
-          <a:p>
-            <a:pPr algn="l">
-              <a:lnSpc>
-                <a:spcPct val="150000"/>
+            <a:endParaRPr lang="en-US" sz="1300" noProof="1"/>
+          </a:p>
+          <a:p>
+            <a:pPr algn="l">
+              <a:lnSpc>
+                <a:spcPct val="140000"/>
               </a:lnSpc>
               <a:spcBef>
                 <a:spcPts val="800"/>
               </a:spcBef>
             </a:pPr>
             <a:r>
-              <a:rPr lang="en-US" sz="1300">
+              <a:rPr lang="en-US" sz="1300" noProof="1">
                 <a:solidFill>
                   <a:srgbClr val="4E4E4E"/>
                 </a:solidFill>
@@ -3603,19 +3629,19 @@
               </a:rPr>
               <a:t>Библиотека типовых проектов</a:t>
             </a:r>
-            <a:endParaRPr lang="en-US" sz="1300"/>
-          </a:p>
-          <a:p>
-            <a:pPr algn="l">
-              <a:lnSpc>
-                <a:spcPct val="150000"/>
+            <a:endParaRPr lang="en-US" sz="1300" noProof="1"/>
+          </a:p>
+          <a:p>
+            <a:pPr algn="l">
+              <a:lnSpc>
+                <a:spcPct val="140000"/>
               </a:lnSpc>
               <a:spcBef>
                 <a:spcPts val="800"/>
               </a:spcBef>
             </a:pPr>
             <a:r>
-              <a:rPr lang="en-US" sz="1300">
+              <a:rPr lang="en-US" sz="1300" noProof="1">
                 <a:solidFill>
                   <a:srgbClr val="4E4E4E"/>
                 </a:solidFill>
@@ -3624,7 +3650,7 @@
               </a:rPr>
               <a:t>Пожелания проектировщиков — по итогам пилота</a:t>
             </a:r>
-            <a:endParaRPr lang="en-US" sz="1300"/>
+            <a:endParaRPr lang="en-US" sz="1300" noProof="1"/>
           </a:p>
         </p:txBody>
       </p:sp>
@@ -3683,7 +3709,7 @@
               </a:lnSpc>
             </a:pPr>
             <a:r>
-              <a:rPr lang="en-US" sz="1100">
+              <a:rPr lang="en-US" sz="1100" noProof="1">
                 <a:solidFill>
                   <a:srgbClr val="818181"/>
                 </a:solidFill>
@@ -3692,7 +3718,7 @@
               </a:rPr>
               <a:t>13</a:t>
             </a:r>
-            <a:endParaRPr lang="en-US" sz="1100"/>
+            <a:endParaRPr lang="en-US" sz="1100" noProof="1"/>
           </a:p>
         </p:txBody>
       </p:sp>
@@ -3836,7 +3862,7 @@
               </a:lnSpc>
             </a:pPr>
             <a:r>
-              <a:rPr lang="en-US" sz="2000">
+              <a:rPr lang="en-US" sz="2000" noProof="1">
                 <a:solidFill>
                   <a:srgbClr val="FFFFFF"/>
                 </a:solidFill>
@@ -3845,19 +3871,61 @@
               </a:rPr>
               <a:t>Решения для дома и бизнеса</a:t>
             </a:r>
-            <a:endParaRPr lang="en-US" sz="2000"/>
-          </a:p>
-        </p:txBody>
-      </p:sp>
-      <p:sp>
-        <p:nvSpPr>
-          <p:cNvPr id="6" name="contacts"/>
-          <p:cNvSpPr txBox="1"/>
-          <p:nvPr/>
-        </p:nvSpPr>
-        <p:spPr>
-          <a:xfrm>
-            <a:off x="762000" y="5461000"/>
+            <a:endParaRPr lang="en-US" sz="2000" noProof="1"/>
+          </a:p>
+        </p:txBody>
+      </p:sp>
+      <p:sp>
+        <p:nvSpPr>
+          <p:cNvPr id="6" name="manual-note"/>
+          <p:cNvSpPr txBox="1"/>
+          <p:nvPr/>
+        </p:nvSpPr>
+        <p:spPr>
+          <a:xfrm>
+            <a:off x="762000" y="4876800"/>
+            <a:ext cx="6096000" cy="508000"/>
+          </a:xfrm>
+          <a:prstGeom prst="rect">
+            <a:avLst/>
+          </a:prstGeom>
+          <a:noFill/>
+          <a:ln>
+            <a:noFill/>
+          </a:ln>
+        </p:spPr>
+        <p:txBody>
+          <a:bodyPr lIns="0" rIns="0" tIns="0" bIns="0" wrap="square" rtlCol="0" anchor="t"/>
+          <a:lstStyle/>
+          <a:p>
+            <a:pPr algn="l">
+              <a:lnSpc>
+                <a:spcPct val="140000"/>
+              </a:lnSpc>
+            </a:pPr>
+            <a:r>
+              <a:rPr lang="en-US" sz="1200" noProof="1">
+                <a:solidFill>
+                  <a:srgbClr val="B0B0B0"/>
+                </a:solidFill>
+                <a:latin typeface="MiSans"/>
+                <a:ea typeface="MiSans"/>
+              </a:rPr>
+              <a:t>В комплекте — руководство пользователя: все расчёты разобраны по шагам на сквозном примере (Екатеринбург, 370 м²)</a:t>
+            </a:r>
+            <a:endParaRPr lang="en-US" sz="1200" noProof="1"/>
+          </a:p>
+        </p:txBody>
+      </p:sp>
+      <p:sp>
+        <p:nvSpPr>
+          <p:cNvPr id="7" name="contacts"/>
+          <p:cNvSpPr txBox="1"/>
+          <p:nvPr/>
+        </p:nvSpPr>
+        <p:spPr>
+          <a:xfrm>
+            <a:off x="762000" y="5511800"/>
             <a:ext cx="6096000" cy="889000"/>
           </a:xfrm>
           <a:prstGeom prst="rect">
@@ -3878,16 +3946,16 @@
               </a:lnSpc>
             </a:pPr>
             <a:r>
-              <a:rPr lang="en-US" sz="1300">
+              <a:rPr lang="en-US" sz="1300" noProof="1">
                 <a:solidFill>
                   <a:srgbClr val="B0B0B0"/>
                 </a:solidFill>
                 <a:latin typeface="MiSans"/>
                 <a:ea typeface="MiSans"/>
               </a:rPr>
-              <a:t>Автор и контакты — placeholder</a:t>
-            </a:r>
-            <a:endParaRPr lang="en-US" sz="1300"/>
+              <a:t>Автор: Асадуллин Айдар</a:t>
+            </a:r>
+            <a:endParaRPr lang="en-US" sz="1300" noProof="1"/>
           </a:p>
           <a:p>
             <a:pPr algn="l">
@@ -3896,22 +3964,22 @@
               </a:lnSpc>
             </a:pPr>
             <a:r>
-              <a:rPr lang="en-US" sz="1300">
+              <a:rPr lang="en-US" sz="1300" noProof="1">
                 <a:solidFill>
                   <a:srgbClr val="B0B0B0"/>
                 </a:solidFill>
                 <a:latin typeface="MiSans"/>
                 <a:ea typeface="MiSans"/>
               </a:rPr>
-              <a:t>e-mail · телефон · сайт</a:t>
-            </a:r>
-            <a:endParaRPr lang="en-US" sz="1300"/>
-          </a:p>
-        </p:txBody>
-      </p:sp>
-      <p:sp>
-        <p:nvSpPr>
-          <p:cNvPr id="7" name="page-num"/>
+              <a:t>aydar.asadullin@rhsolutions.ru · +7 922 157 01 80</a:t>
+            </a:r>
+            <a:endParaRPr lang="en-US" sz="1300" noProof="1"/>
+          </a:p>
+        </p:txBody>
+      </p:sp>
+      <p:sp>
+        <p:nvSpPr>
+          <p:cNvPr id="8" name="page-num"/>
           <p:cNvSpPr txBox="1"/>
           <p:nvPr/>
         </p:nvSpPr>
@@ -3938,7 +4006,7 @@
               </a:lnSpc>
             </a:pPr>
             <a:r>
-              <a:rPr lang="en-US" sz="1100">
+              <a:rPr lang="en-US" sz="1100" noProof="1">
                 <a:solidFill>
                   <a:srgbClr val="818181"/>
                 </a:solidFill>
@@ -3947,7 +4015,7 @@
               </a:rPr>
               <a:t>14</a:t>
             </a:r>
-            <a:endParaRPr lang="en-US" sz="1100"/>
+            <a:endParaRPr lang="en-US" sz="1100" noProof="1"/>
           </a:p>
         </p:txBody>
       </p:sp>
@@ -4067,7 +4135,7 @@
               </a:lnSpc>
             </a:pPr>
             <a:r>
-              <a:rPr lang="en-US" sz="8800" b="1">
+              <a:rPr lang="en-US" sz="8800" noProof="1" b="1">
                 <a:solidFill>
                   <a:srgbClr val="E50040"/>
                 </a:solidFill>
@@ -4076,7 +4144,7 @@
               </a:rPr>
               <a:t>01</a:t>
             </a:r>
-            <a:endParaRPr lang="en-US" sz="8800"/>
+            <a:endParaRPr lang="en-US" sz="8800" noProof="1"/>
           </a:p>
         </p:txBody>
       </p:sp>
@@ -4131,7 +4199,7 @@
               </a:lnSpc>
             </a:pPr>
             <a:r>
-              <a:rPr lang="en-US" sz="3800" b="1">
+              <a:rPr lang="en-US" sz="3800" noProof="1" b="1">
                 <a:solidFill>
                   <a:srgbClr val="FFFFFF"/>
                 </a:solidFill>
@@ -4140,7 +4208,7 @@
               </a:rPr>
               <a:t>Основа расчётов</a:t>
             </a:r>
-            <a:endParaRPr lang="en-US" sz="3800"/>
+            <a:endParaRPr lang="en-US" sz="3800" noProof="1"/>
           </a:p>
         </p:txBody>
       </p:sp>
@@ -4173,7 +4241,7 @@
               </a:lnSpc>
             </a:pPr>
             <a:r>
-              <a:rPr lang="en-US" sz="1500">
+              <a:rPr lang="en-US" sz="1500" noProof="1">
                 <a:solidFill>
                   <a:srgbClr val="B0B0B0"/>
                 </a:solidFill>
@@ -4182,7 +4250,7 @@
               </a:rPr>
               <a:t>Нормативная база и логика из пяти шагов</a:t>
             </a:r>
-            <a:endParaRPr lang="en-US" sz="1500"/>
+            <a:endParaRPr lang="en-US" sz="1500" noProof="1"/>
           </a:p>
         </p:txBody>
       </p:sp>
@@ -4215,7 +4283,7 @@
               </a:lnSpc>
             </a:pPr>
             <a:r>
-              <a:rPr lang="en-US" sz="1100">
+              <a:rPr lang="en-US" sz="1100" noProof="1">
                 <a:solidFill>
                   <a:srgbClr val="818181"/>
                 </a:solidFill>
@@ -4224,7 +4292,7 @@
               </a:rPr>
               <a:t>02</a:t>
             </a:r>
-            <a:endParaRPr lang="en-US" sz="1100"/>
+            <a:endParaRPr lang="en-US" sz="1100" noProof="1"/>
           </a:p>
         </p:txBody>
       </p:sp>
@@ -4292,7 +4360,7 @@
               </a:lnSpc>
             </a:pPr>
             <a:r>
-              <a:rPr lang="en-US" sz="1200" b="1" spc="200" kern="0">
+              <a:rPr lang="en-US" sz="1200" noProof="1" b="1" spc="200" kern="0">
                 <a:solidFill>
                   <a:srgbClr val="E50040"/>
                 </a:solidFill>
@@ -4301,7 +4369,7 @@
               </a:rPr>
               <a:t>ОСНОВА РАСЧЁТОВ</a:t>
             </a:r>
-            <a:endParaRPr lang="en-US" sz="1200"/>
+            <a:endParaRPr lang="en-US" sz="1200" noProof="1"/>
           </a:p>
         </p:txBody>
       </p:sp>
@@ -4334,7 +4402,7 @@
               </a:lnSpc>
             </a:pPr>
             <a:r>
-              <a:rPr lang="en-US" sz="3000" b="1">
+              <a:rPr lang="en-US" sz="3000" noProof="1" b="1">
                 <a:solidFill>
                   <a:srgbClr val="000000"/>
                 </a:solidFill>
@@ -4343,7 +4411,7 @@
               </a:rPr>
               <a:t>Методика — только на нормативах</a:t>
             </a:r>
-            <a:endParaRPr lang="en-US" sz="3000"/>
+            <a:endParaRPr lang="en-US" sz="3000" noProof="1"/>
           </a:p>
         </p:txBody>
       </p:sp>
@@ -4424,7 +4492,7 @@
               </a:lnSpc>
             </a:pPr>
             <a:r>
-              <a:rPr lang="en-US" sz="1700" b="1">
+              <a:rPr lang="en-US" sz="1700" noProof="1" b="1">
                 <a:solidFill>
                   <a:srgbClr val="000000"/>
                 </a:solidFill>
@@ -4433,7 +4501,7 @@
               </a:rPr>
               <a:t>СП 131.13330.2025</a:t>
             </a:r>
-            <a:endParaRPr lang="en-US" sz="1700"/>
+            <a:endParaRPr lang="en-US" sz="1700" noProof="1"/>
           </a:p>
         </p:txBody>
       </p:sp>
@@ -4466,7 +4534,7 @@
               </a:lnSpc>
             </a:pPr>
             <a:r>
-              <a:rPr lang="en-US" sz="1300">
+              <a:rPr lang="en-US" sz="1300" noProof="1">
                 <a:solidFill>
                   <a:srgbClr val="4E4E4E"/>
                 </a:solidFill>
@@ -4476,7 +4544,7 @@
               <a:t>«Строительная климатология»: t холодной пятидневки, ветер, влажность, снеговая нагрузка — база </a:t>
             </a:r>
             <a:r>
-              <a:rPr lang="en-US" sz="1300" b="1">
+              <a:rPr lang="en-US" sz="1300" noProof="1" b="1">
                 <a:solidFill>
                   <a:srgbClr val="4E4E4E"/>
                 </a:solidFill>
@@ -4486,7 +4554,7 @@
               <a:t>550 городов РФ</a:t>
             </a:r>
             <a:r>
-              <a:rPr lang="en-US" sz="1300">
+              <a:rPr lang="en-US" sz="1300" noProof="1">
                 <a:solidFill>
                   <a:srgbClr val="4E4E4E"/>
                 </a:solidFill>
@@ -4495,7 +4563,7 @@
               </a:rPr>
               <a:t> внутри программы</a:t>
             </a:r>
-            <a:endParaRPr lang="en-US" sz="1300"/>
+            <a:endParaRPr lang="en-US" sz="1300" noProof="1"/>
           </a:p>
         </p:txBody>
       </p:sp>
@@ -4554,7 +4622,7 @@
               </a:lnSpc>
             </a:pPr>
             <a:r>
-              <a:rPr lang="en-US" sz="1700" b="1">
+              <a:rPr lang="en-US" sz="1700" noProof="1" b="1">
                 <a:solidFill>
                   <a:srgbClr val="000000"/>
                 </a:solidFill>
@@ -4563,7 +4631,7 @@
               </a:rPr>
               <a:t>VDI 2075</a:t>
             </a:r>
-            <a:endParaRPr lang="en-US" sz="1700"/>
+            <a:endParaRPr lang="en-US" sz="1700" noProof="1"/>
           </a:p>
         </p:txBody>
       </p:sp>
@@ -4596,7 +4664,7 @@
               </a:lnSpc>
             </a:pPr>
             <a:r>
-              <a:rPr lang="en-US" sz="1300">
+              <a:rPr lang="en-US" sz="1300" noProof="1">
                 <a:solidFill>
                   <a:srgbClr val="4E4E4E"/>
                 </a:solidFill>
@@ -4605,7 +4673,7 @@
               </a:rPr>
               <a:t>Гидравлическая балансировка контуров: увязка потерь давления дросселированием на коллекторах</a:t>
             </a:r>
-            <a:endParaRPr lang="en-US" sz="1300"/>
+            <a:endParaRPr lang="en-US" sz="1300" noProof="1"/>
           </a:p>
         </p:txBody>
       </p:sp>
@@ -4664,7 +4732,7 @@
               </a:lnSpc>
             </a:pPr>
             <a:r>
-              <a:rPr lang="en-US" sz="1700" b="1">
+              <a:rPr lang="en-US" sz="1700" noProof="1" b="1">
                 <a:solidFill>
                   <a:srgbClr val="000000"/>
                 </a:solidFill>
@@ -4673,7 +4741,7 @@
               </a:rPr>
               <a:t>DIN EN 60534</a:t>
             </a:r>
-            <a:endParaRPr lang="en-US" sz="1700"/>
+            <a:endParaRPr lang="en-US" sz="1700" noProof="1"/>
           </a:p>
         </p:txBody>
       </p:sp>
@@ -4706,7 +4774,7 @@
               </a:lnSpc>
             </a:pPr>
             <a:r>
-              <a:rPr lang="en-US" sz="1300">
+              <a:rPr lang="en-US" sz="1300" noProof="1">
                 <a:solidFill>
                   <a:srgbClr val="4E4E4E"/>
                 </a:solidFill>
@@ -4715,7 +4783,7 @@
               </a:rPr>
               <a:t>Промышленные регулирующие клапаны: подбор по коэффициенту пропускной способности Kv</a:t>
             </a:r>
-            <a:endParaRPr lang="en-US" sz="1300"/>
+            <a:endParaRPr lang="en-US" sz="1300" noProof="1"/>
           </a:p>
         </p:txBody>
       </p:sp>
@@ -4774,7 +4842,7 @@
               </a:lnSpc>
             </a:pPr>
             <a:r>
-              <a:rPr lang="en-US" sz="1700" b="1">
+              <a:rPr lang="en-US" sz="1700" noProof="1" b="1">
                 <a:solidFill>
                   <a:srgbClr val="000000"/>
                 </a:solidFill>
@@ -4783,7 +4851,7 @@
               </a:rPr>
               <a:t>ASHRAE Handbook</a:t>
             </a:r>
-            <a:endParaRPr lang="en-US" sz="1700"/>
+            <a:endParaRPr lang="en-US" sz="1700" noProof="1"/>
           </a:p>
         </p:txBody>
       </p:sp>
@@ -4816,7 +4884,7 @@
               </a:lnSpc>
             </a:pPr>
             <a:r>
-              <a:rPr lang="en-US" sz="1300">
+              <a:rPr lang="en-US" sz="1300" noProof="1">
                 <a:solidFill>
                   <a:srgbClr val="4E4E4E"/>
                 </a:solidFill>
@@ -4825,7 +4893,7 @@
               </a:rPr>
               <a:t>Теплофизика теплоносителей: плотность, вязкость, теплоёмкость растворов этилен- и пропиленгликоля 10–90 %</a:t>
             </a:r>
-            <a:endParaRPr lang="en-US" sz="1300"/>
+            <a:endParaRPr lang="en-US" sz="1300" noProof="1"/>
           </a:p>
         </p:txBody>
       </p:sp>
@@ -4858,7 +4926,7 @@
               </a:lnSpc>
             </a:pPr>
             <a:r>
-              <a:rPr lang="en-US" sz="1300">
+              <a:rPr lang="en-US" sz="1300" noProof="1">
                 <a:solidFill>
                   <a:srgbClr val="818181"/>
                 </a:solidFill>
@@ -4867,7 +4935,7 @@
               </a:rPr>
               <a:t>Единая методика для всех проектировщиков — расчёт воспроизводим и проверяем по первоисточникам</a:t>
             </a:r>
-            <a:endParaRPr lang="en-US" sz="1300"/>
+            <a:endParaRPr lang="en-US" sz="1300" noProof="1"/>
           </a:p>
         </p:txBody>
       </p:sp>
@@ -4926,7 +4994,7 @@
               </a:lnSpc>
             </a:pPr>
             <a:r>
-              <a:rPr lang="en-US" sz="1100">
+              <a:rPr lang="en-US" sz="1100" noProof="1">
                 <a:solidFill>
                   <a:srgbClr val="818181"/>
                 </a:solidFill>
@@ -4935,7 +5003,7 @@
               </a:rPr>
               <a:t>03</a:t>
             </a:r>
-            <a:endParaRPr lang="en-US" sz="1100"/>
+            <a:endParaRPr lang="en-US" sz="1100" noProof="1"/>
           </a:p>
         </p:txBody>
       </p:sp>
@@ -5003,7 +5071,7 @@
               </a:lnSpc>
             </a:pPr>
             <a:r>
-              <a:rPr lang="en-US" sz="1200" b="1" spc="200" kern="0">
+              <a:rPr lang="en-US" sz="1200" noProof="1" b="1" spc="200" kern="0">
                 <a:solidFill>
                   <a:srgbClr val="E50040"/>
                 </a:solidFill>
@@ -5012,7 +5080,7 @@
               </a:rPr>
               <a:t>ЛОГИКА РАСЧЁТА</a:t>
             </a:r>
-            <a:endParaRPr lang="en-US" sz="1200"/>
+            <a:endParaRPr lang="en-US" sz="1200" noProof="1"/>
           </a:p>
         </p:txBody>
       </p:sp>
@@ -5045,7 +5113,7 @@
               </a:lnSpc>
             </a:pPr>
             <a:r>
-              <a:rPr lang="en-US" sz="3000" b="1">
+              <a:rPr lang="en-US" sz="3000" noProof="1" b="1">
                 <a:solidFill>
                   <a:srgbClr val="000000"/>
                 </a:solidFill>
@@ -5054,7 +5122,7 @@
               </a:rPr>
               <a:t>Пять шагов — от климата до спецификации</a:t>
             </a:r>
-            <a:endParaRPr lang="en-US" sz="3000"/>
+            <a:endParaRPr lang="en-US" sz="3000" noProof="1"/>
           </a:p>
         </p:txBody>
       </p:sp>
@@ -5131,7 +5199,7 @@
               </a:lnSpc>
             </a:pPr>
             <a:r>
-              <a:rPr lang="en-US" sz="1600" b="1">
+              <a:rPr lang="en-US" sz="1600" noProof="1" b="1">
                 <a:solidFill>
                   <a:srgbClr val="FFFFFF"/>
                 </a:solidFill>
@@ -5140,7 +5208,7 @@
               </a:rPr>
               <a:t>01</a:t>
             </a:r>
-            <a:endParaRPr lang="en-US" sz="1600"/>
+            <a:endParaRPr lang="en-US" sz="1600" noProof="1"/>
           </a:p>
         </p:txBody>
       </p:sp>
@@ -5173,7 +5241,7 @@
               </a:lnSpc>
             </a:pPr>
             <a:r>
-              <a:rPr lang="en-US" sz="1400" b="1">
+              <a:rPr lang="en-US" sz="1400" noProof="1" b="1">
                 <a:solidFill>
                   <a:srgbClr val="FFFFFF"/>
                 </a:solidFill>
@@ -5182,7 +5250,7 @@
               </a:rPr>
               <a:t>Климат</a:t>
             </a:r>
-            <a:endParaRPr lang="en-US" sz="1400"/>
+            <a:endParaRPr lang="en-US" sz="1400" noProof="1"/>
           </a:p>
         </p:txBody>
       </p:sp>
@@ -5239,7 +5307,7 @@
               </a:lnSpc>
             </a:pPr>
             <a:r>
-              <a:rPr lang="en-US" sz="1600" b="1">
+              <a:rPr lang="en-US" sz="1600" noProof="1" b="1">
                 <a:solidFill>
                   <a:srgbClr val="E50040"/>
                 </a:solidFill>
@@ -5248,7 +5316,7 @@
               </a:rPr>
               <a:t>02</a:t>
             </a:r>
-            <a:endParaRPr lang="en-US" sz="1600"/>
+            <a:endParaRPr lang="en-US" sz="1600" noProof="1"/>
           </a:p>
         </p:txBody>
       </p:sp>
@@ -5281,7 +5349,7 @@
               </a:lnSpc>
             </a:pPr>
             <a:r>
-              <a:rPr lang="en-US" sz="1400" b="1">
+              <a:rPr lang="en-US" sz="1400" noProof="1" b="1">
                 <a:solidFill>
                   <a:srgbClr val="000000"/>
                 </a:solidFill>
@@ -5290,7 +5358,7 @@
               </a:rPr>
               <a:t>Конструкция</a:t>
             </a:r>
-            <a:endParaRPr lang="en-US" sz="1400"/>
+            <a:endParaRPr lang="en-US" sz="1400" noProof="1"/>
           </a:p>
         </p:txBody>
       </p:sp>
@@ -5347,7 +5415,7 @@
               </a:lnSpc>
             </a:pPr>
             <a:r>
-              <a:rPr lang="en-US" sz="1600" b="1">
+              <a:rPr lang="en-US" sz="1600" noProof="1" b="1">
                 <a:solidFill>
                   <a:srgbClr val="E50040"/>
                 </a:solidFill>
@@ -5356,7 +5424,7 @@
               </a:rPr>
               <a:t>03</a:t>
             </a:r>
-            <a:endParaRPr lang="en-US" sz="1600"/>
+            <a:endParaRPr lang="en-US" sz="1600" noProof="1"/>
           </a:p>
         </p:txBody>
       </p:sp>
@@ -5389,7 +5457,7 @@
               </a:lnSpc>
             </a:pPr>
             <a:r>
-              <a:rPr lang="en-US" sz="1400" b="1">
+              <a:rPr lang="en-US" sz="1400" noProof="1" b="1">
                 <a:solidFill>
                   <a:srgbClr val="000000"/>
                 </a:solidFill>
@@ -5398,7 +5466,7 @@
               </a:rPr>
               <a:t>Тепловой</a:t>
             </a:r>
-            <a:endParaRPr lang="en-US" sz="1400"/>
+            <a:endParaRPr lang="en-US" sz="1400" noProof="1"/>
           </a:p>
         </p:txBody>
       </p:sp>
@@ -5455,7 +5523,7 @@
               </a:lnSpc>
             </a:pPr>
             <a:r>
-              <a:rPr lang="en-US" sz="1600" b="1">
+              <a:rPr lang="en-US" sz="1600" noProof="1" b="1">
                 <a:solidFill>
                   <a:srgbClr val="E50040"/>
                 </a:solidFill>
@@ -5464,7 +5532,7 @@
               </a:rPr>
               <a:t>04</a:t>
             </a:r>
-            <a:endParaRPr lang="en-US" sz="1600"/>
+            <a:endParaRPr lang="en-US" sz="1600" noProof="1"/>
           </a:p>
         </p:txBody>
       </p:sp>
@@ -5497,7 +5565,7 @@
               </a:lnSpc>
             </a:pPr>
             <a:r>
-              <a:rPr lang="en-US" sz="1400" b="1">
+              <a:rPr lang="en-US" sz="1400" noProof="1" b="1">
                 <a:solidFill>
                   <a:srgbClr val="000000"/>
                 </a:solidFill>
@@ -5506,7 +5574,7 @@
               </a:rPr>
               <a:t>Гидравлика</a:t>
             </a:r>
-            <a:endParaRPr lang="en-US" sz="1400"/>
+            <a:endParaRPr lang="en-US" sz="1400" noProof="1"/>
           </a:p>
         </p:txBody>
       </p:sp>
@@ -5561,7 +5629,7 @@
               </a:lnSpc>
             </a:pPr>
             <a:r>
-              <a:rPr lang="en-US" sz="1600" b="1">
+              <a:rPr lang="en-US" sz="1600" noProof="1" b="1">
                 <a:solidFill>
                   <a:srgbClr val="000000"/>
                 </a:solidFill>
@@ -5570,7 +5638,7 @@
               </a:rPr>
               <a:t>05</a:t>
             </a:r>
-            <a:endParaRPr lang="en-US" sz="1600"/>
+            <a:endParaRPr lang="en-US" sz="1600" noProof="1"/>
           </a:p>
         </p:txBody>
       </p:sp>
@@ -5603,7 +5671,7 @@
               </a:lnSpc>
             </a:pPr>
             <a:r>
-              <a:rPr lang="en-US" sz="1400" b="1">
+              <a:rPr lang="en-US" sz="1400" noProof="1" b="1">
                 <a:solidFill>
                   <a:srgbClr val="000000"/>
                 </a:solidFill>
@@ -5612,7 +5680,7 @@
               </a:rPr>
               <a:t>Результаты</a:t>
             </a:r>
-            <a:endParaRPr lang="en-US" sz="1400"/>
+            <a:endParaRPr lang="en-US" sz="1400" noProof="1"/>
           </a:p>
         </p:txBody>
       </p:sp>
@@ -5645,7 +5713,7 @@
               </a:lnSpc>
             </a:pPr>
             <a:r>
-              <a:rPr lang="en-US" sz="1200">
+              <a:rPr lang="en-US" sz="1200" noProof="1">
                 <a:solidFill>
                   <a:srgbClr val="4E4E4E"/>
                 </a:solidFill>
@@ -5654,7 +5722,7 @@
               </a:rPr>
               <a:t>Город из базы 550 городов РФ — параметры СП подставляются автоматически</a:t>
             </a:r>
-            <a:endParaRPr lang="en-US" sz="1200"/>
+            <a:endParaRPr lang="en-US" sz="1200" noProof="1"/>
           </a:p>
         </p:txBody>
       </p:sp>
@@ -5687,7 +5755,7 @@
               </a:lnSpc>
             </a:pPr>
             <a:r>
-              <a:rPr lang="en-US" sz="1200">
+              <a:rPr lang="en-US" sz="1200" noProof="1">
                 <a:solidFill>
                   <a:srgbClr val="4E4E4E"/>
                 </a:solidFill>
@@ -5696,7 +5764,7 @@
               </a:rPr>
               <a:t>Слои «пирога» над и под трубой, термосопротивления R₁ и R₂</a:t>
             </a:r>
-            <a:endParaRPr lang="en-US" sz="1200"/>
+            <a:endParaRPr lang="en-US" sz="1200" noProof="1"/>
           </a:p>
         </p:txBody>
       </p:sp>
@@ -5729,7 +5797,7 @@
               </a:lnSpc>
             </a:pPr>
             <a:r>
-              <a:rPr lang="en-US" sz="1200">
+              <a:rPr lang="en-US" sz="1200" noProof="1">
                 <a:solidFill>
                   <a:srgbClr val="4E4E4E"/>
                 </a:solidFill>
@@ -5738,7 +5806,7 @@
               </a:rPr>
               <a:t>Режим, труба и шаг укладки — удельная мощность, Вт/м²</a:t>
             </a:r>
-            <a:endParaRPr lang="en-US" sz="1200"/>
+            <a:endParaRPr lang="en-US" sz="1200" noProof="1"/>
           </a:p>
         </p:txBody>
       </p:sp>
@@ -5771,7 +5839,7 @@
               </a:lnSpc>
             </a:pPr>
             <a:r>
-              <a:rPr lang="en-US" sz="1200">
+              <a:rPr lang="en-US" sz="1200" noProof="1">
                 <a:solidFill>
                   <a:srgbClr val="4E4E4E"/>
                 </a:solidFill>
@@ -5780,7 +5848,7 @@
               </a:rPr>
               <a:t>Контуры по коллекторам, потери давления, балансировка</a:t>
             </a:r>
-            <a:endParaRPr lang="en-US" sz="1200"/>
+            <a:endParaRPr lang="en-US" sz="1200" noProof="1"/>
           </a:p>
         </p:txBody>
       </p:sp>
@@ -5813,7 +5881,7 @@
               </a:lnSpc>
             </a:pPr>
             <a:r>
-              <a:rPr lang="en-US" sz="1200">
+              <a:rPr lang="en-US" sz="1200" noProof="1">
                 <a:solidFill>
                   <a:srgbClr val="4E4E4E"/>
                 </a:solidFill>
@@ -5822,7 +5890,7 @@
               </a:rPr>
               <a:t>КПИ, ведомость оборудования, выгрузка отчёта в PDF</a:t>
             </a:r>
-            <a:endParaRPr lang="en-US" sz="1200"/>
+            <a:endParaRPr lang="en-US" sz="1200" noProof="1"/>
           </a:p>
         </p:txBody>
       </p:sp>
@@ -5905,7 +5973,7 @@
               </a:lnSpc>
             </a:pPr>
             <a:r>
-              <a:rPr lang="en-US" sz="1300">
+              <a:rPr lang="en-US" sz="1300" noProof="1">
                 <a:solidFill>
                   <a:srgbClr val="4E4E4E"/>
                 </a:solidFill>
@@ -5914,7 +5982,7 @@
               </a:rPr>
               <a:t>зелёный бейдж — данные актуальны</a:t>
             </a:r>
-            <a:endParaRPr lang="en-US" sz="1300"/>
+            <a:endParaRPr lang="en-US" sz="1300" noProof="1"/>
           </a:p>
         </p:txBody>
       </p:sp>
@@ -5971,7 +6039,7 @@
               </a:lnSpc>
             </a:pPr>
             <a:r>
-              <a:rPr lang="en-US" sz="1300">
+              <a:rPr lang="en-US" sz="1300" noProof="1">
                 <a:solidFill>
                   <a:srgbClr val="4E4E4E"/>
                 </a:solidFill>
@@ -5980,7 +6048,7 @@
               </a:rPr>
               <a:t>красный бейдж — нужен пересчёт после изменений</a:t>
             </a:r>
-            <a:endParaRPr lang="en-US" sz="1300"/>
+            <a:endParaRPr lang="en-US" sz="1300" noProof="1"/>
           </a:p>
         </p:txBody>
       </p:sp>
@@ -6013,7 +6081,7 @@
               </a:lnSpc>
             </a:pPr>
             <a:r>
-              <a:rPr lang="en-US" sz="1100">
+              <a:rPr lang="en-US" sz="1100" noProof="1">
                 <a:solidFill>
                   <a:srgbClr val="818181"/>
                 </a:solidFill>
@@ -6022,7 +6090,7 @@
               </a:rPr>
               <a:t>Навигация между шагами свободная: программа сама следит за актуальностью данных на каждом шаге</a:t>
             </a:r>
-            <a:endParaRPr lang="en-US" sz="1100"/>
+            <a:endParaRPr lang="en-US" sz="1100" noProof="1"/>
           </a:p>
         </p:txBody>
       </p:sp>
@@ -6081,7 +6149,7 @@
               </a:lnSpc>
             </a:pPr>
             <a:r>
-              <a:rPr lang="en-US" sz="1100">
+              <a:rPr lang="en-US" sz="1100" noProof="1">
                 <a:solidFill>
                   <a:srgbClr val="818181"/>
                 </a:solidFill>
@@ -6090,7 +6158,7 @@
               </a:rPr>
               <a:t>04</a:t>
             </a:r>
-            <a:endParaRPr lang="en-US" sz="1100"/>
+            <a:endParaRPr lang="en-US" sz="1100" noProof="1"/>
           </a:p>
         </p:txBody>
       </p:sp>
@@ -6158,7 +6226,7 @@
               </a:lnSpc>
             </a:pPr>
             <a:r>
-              <a:rPr lang="en-US" sz="1200" b="1" spc="200" kern="0">
+              <a:rPr lang="en-US" sz="1200" noProof="1" b="1" spc="200" kern="0">
                 <a:solidFill>
                   <a:srgbClr val="E50040"/>
                 </a:solidFill>
@@ -6167,7 +6235,7 @@
               </a:rPr>
               <a:t>ШАГ 1 · КЛИМАТ</a:t>
             </a:r>
-            <a:endParaRPr lang="en-US" sz="1200"/>
+            <a:endParaRPr lang="en-US" sz="1200" noProof="1"/>
           </a:p>
         </p:txBody>
       </p:sp>
@@ -6200,7 +6268,7 @@
               </a:lnSpc>
             </a:pPr>
             <a:r>
-              <a:rPr lang="en-US" sz="3000" b="1">
+              <a:rPr lang="en-US" sz="3000" noProof="1" b="1">
                 <a:solidFill>
                   <a:srgbClr val="000000"/>
                 </a:solidFill>
@@ -6209,7 +6277,7 @@
               </a:rPr>
               <a:t>Климат подставляется сам</a:t>
             </a:r>
-            <a:endParaRPr lang="en-US" sz="3000"/>
+            <a:endParaRPr lang="en-US" sz="3000" noProof="1"/>
           </a:p>
         </p:txBody>
       </p:sp>
@@ -6286,7 +6354,7 @@
               </a:lnSpc>
             </a:pPr>
             <a:r>
-              <a:rPr lang="en-US" sz="1300" b="1">
+              <a:rPr lang="en-US" sz="1300" noProof="1" b="1">
                 <a:solidFill>
                   <a:srgbClr val="4E4E4E"/>
                 </a:solidFill>
@@ -6296,7 +6364,7 @@
               <a:t>550 городов РФ</a:t>
             </a:r>
             <a:r>
-              <a:rPr lang="en-US" sz="1300">
+              <a:rPr lang="en-US" sz="1300" noProof="1">
                 <a:solidFill>
                   <a:srgbClr val="4E4E4E"/>
                 </a:solidFill>
@@ -6305,7 +6373,7 @@
               </a:rPr>
               <a:t> — поиск с автоподстановкой, данные СП 131.13330.2025</a:t>
             </a:r>
-            <a:endParaRPr lang="en-US" sz="1300"/>
+            <a:endParaRPr lang="en-US" sz="1300" noProof="1"/>
           </a:p>
         </p:txBody>
       </p:sp>
@@ -6360,7 +6428,7 @@
               </a:lnSpc>
             </a:pPr>
             <a:r>
-              <a:rPr lang="en-US" sz="1300" b="1">
+              <a:rPr lang="en-US" sz="1300" noProof="1" b="1">
                 <a:solidFill>
                   <a:srgbClr val="4E4E4E"/>
                 </a:solidFill>
@@ -6370,7 +6438,7 @@
               <a:t>Расчётная t — автоматически</a:t>
             </a:r>
             <a:r>
-              <a:rPr lang="en-US" sz="1300">
+              <a:rPr lang="en-US" sz="1300" noProof="1">
                 <a:solidFill>
                   <a:srgbClr val="4E4E4E"/>
                 </a:solidFill>
@@ -6379,7 +6447,7 @@
               </a:rPr>
               <a:t> по таблице 1.6: колонки −10 / −15 / −20 °C</a:t>
             </a:r>
-            <a:endParaRPr lang="en-US" sz="1300"/>
+            <a:endParaRPr lang="en-US" sz="1300" noProof="1"/>
           </a:p>
         </p:txBody>
       </p:sp>
@@ -6434,7 +6502,7 @@
               </a:lnSpc>
             </a:pPr>
             <a:r>
-              <a:rPr lang="en-US" sz="1300" b="1">
+              <a:rPr lang="en-US" sz="1300" noProof="1" b="1">
                 <a:solidFill>
                   <a:srgbClr val="4E4E4E"/>
                 </a:solidFill>
@@ -6444,7 +6512,7 @@
               <a:t>Ветер, влажность, снегопад</a:t>
             </a:r>
             <a:r>
-              <a:rPr lang="en-US" sz="1300">
+              <a:rPr lang="en-US" sz="1300" noProof="1">
                 <a:solidFill>
                   <a:srgbClr val="4E4E4E"/>
                 </a:solidFill>
@@ -6453,7 +6521,7 @@
               </a:rPr>
               <a:t> — из норм, доступна ручная корректировка</a:t>
             </a:r>
-            <a:endParaRPr lang="en-US" sz="1300"/>
+            <a:endParaRPr lang="en-US" sz="1300" noProof="1"/>
           </a:p>
         </p:txBody>
       </p:sp>
@@ -6508,7 +6576,7 @@
               </a:lnSpc>
             </a:pPr>
             <a:r>
-              <a:rPr lang="en-US" sz="1300" b="1">
+              <a:rPr lang="en-US" sz="1300" noProof="1" b="1">
                 <a:solidFill>
                   <a:srgbClr val="4E4E4E"/>
                 </a:solidFill>
@@ -6518,7 +6586,7 @@
               <a:t>«Повышенные требования»</a:t>
             </a:r>
             <a:r>
-              <a:rPr lang="en-US" sz="1300">
+              <a:rPr lang="en-US" sz="1300" noProof="1">
                 <a:solidFill>
                   <a:srgbClr val="4E4E4E"/>
                 </a:solidFill>
@@ -6527,7 +6595,7 @@
               </a:rPr>
               <a:t> — флаг для ответственных объектов: всегда −20 °C</a:t>
             </a:r>
-            <a:endParaRPr lang="en-US" sz="1300"/>
+            <a:endParaRPr lang="en-US" sz="1300" noProof="1"/>
           </a:p>
         </p:txBody>
       </p:sp>
@@ -6615,7 +6683,7 @@
               </a:lnSpc>
             </a:pPr>
             <a:r>
-              <a:rPr lang="en-US" sz="1100">
+              <a:rPr lang="en-US" sz="1100" noProof="1">
                 <a:solidFill>
                   <a:srgbClr val="818181"/>
                 </a:solidFill>
@@ -6624,7 +6692,7 @@
               </a:rPr>
               <a:t>Екатеринбург: t холодной пятидневки −30 °C, расчётная колонка −15 °C (Zone_M15)</a:t>
             </a:r>
-            <a:endParaRPr lang="en-US" sz="1100"/>
+            <a:endParaRPr lang="en-US" sz="1100" noProof="1"/>
           </a:p>
         </p:txBody>
       </p:sp>
@@ -6683,7 +6751,7 @@
               </a:lnSpc>
             </a:pPr>
             <a:r>
-              <a:rPr lang="en-US" sz="1100">
+              <a:rPr lang="en-US" sz="1100" noProof="1">
                 <a:solidFill>
                   <a:srgbClr val="818181"/>
                 </a:solidFill>
@@ -6692,7 +6760,7 @@
               </a:rPr>
               <a:t>05</a:t>
             </a:r>
-            <a:endParaRPr lang="en-US" sz="1100"/>
+            <a:endParaRPr lang="en-US" sz="1100" noProof="1"/>
           </a:p>
         </p:txBody>
       </p:sp>
@@ -6760,7 +6828,7 @@
               </a:lnSpc>
             </a:pPr>
             <a:r>
-              <a:rPr lang="en-US" sz="1200" b="1" spc="200" kern="0">
+              <a:rPr lang="en-US" sz="1200" noProof="1" b="1" spc="200" kern="0">
                 <a:solidFill>
                   <a:srgbClr val="E50040"/>
                 </a:solidFill>
@@ -6769,7 +6837,7 @@
               </a:rPr>
               <a:t>ШАГ 2 · КОНСТРУКЦИЯ</a:t>
             </a:r>
-            <a:endParaRPr lang="en-US" sz="1200"/>
+            <a:endParaRPr lang="en-US" sz="1200" noProof="1"/>
           </a:p>
         </p:txBody>
       </p:sp>
@@ -6802,7 +6870,7 @@
               </a:lnSpc>
             </a:pPr>
             <a:r>
-              <a:rPr lang="en-US" sz="3000" b="1">
+              <a:rPr lang="en-US" sz="3000" noProof="1" b="1">
                 <a:solidFill>
                   <a:srgbClr val="000000"/>
                 </a:solidFill>
@@ -6811,7 +6879,7 @@
               </a:rPr>
               <a:t>«Пирог» — слой за слоем</a:t>
             </a:r>
-            <a:endParaRPr lang="en-US" sz="3000"/>
+            <a:endParaRPr lang="en-US" sz="3000" noProof="1"/>
           </a:p>
         </p:txBody>
       </p:sp>
@@ -6888,7 +6956,7 @@
               </a:lnSpc>
             </a:pPr>
             <a:r>
-              <a:rPr lang="en-US" sz="1300" b="1">
+              <a:rPr lang="en-US" sz="1300" noProof="1" b="1">
                 <a:solidFill>
                   <a:srgbClr val="4E4E4E"/>
                 </a:solidFill>
@@ -6898,7 +6966,7 @@
               <a:t>Слои над и под трубой</a:t>
             </a:r>
             <a:r>
-              <a:rPr lang="en-US" sz="1300">
+              <a:rPr lang="en-US" sz="1300" noProof="1">
                 <a:solidFill>
                   <a:srgbClr val="4E4E4E"/>
                 </a:solidFill>
@@ -6907,7 +6975,7 @@
               </a:rPr>
               <a:t> — из встроенного справочника материалов</a:t>
             </a:r>
-            <a:endParaRPr lang="en-US" sz="1300"/>
+            <a:endParaRPr lang="en-US" sz="1300" noProof="1"/>
           </a:p>
         </p:txBody>
       </p:sp>
@@ -6962,7 +7030,7 @@
               </a:lnSpc>
             </a:pPr>
             <a:r>
-              <a:rPr lang="en-US" sz="1300" b="1">
+              <a:rPr lang="en-US" sz="1300" noProof="1" b="1">
                 <a:solidFill>
                   <a:srgbClr val="4E4E4E"/>
                 </a:solidFill>
@@ -6972,7 +7040,7 @@
               <a:t>λА / λБ</a:t>
             </a:r>
             <a:r>
-              <a:rPr lang="en-US" sz="1300">
+              <a:rPr lang="en-US" sz="1300" noProof="1">
                 <a:solidFill>
                   <a:srgbClr val="4E4E4E"/>
                 </a:solidFill>
@@ -6981,7 +7049,7 @@
               </a:rPr>
               <a:t> — сухие и влажные условия в зависимости от УГВ</a:t>
             </a:r>
-            <a:endParaRPr lang="en-US" sz="1300"/>
+            <a:endParaRPr lang="en-US" sz="1300" noProof="1"/>
           </a:p>
         </p:txBody>
       </p:sp>
@@ -7036,7 +7104,7 @@
               </a:lnSpc>
             </a:pPr>
             <a:r>
-              <a:rPr lang="en-US" sz="1300" b="1">
+              <a:rPr lang="en-US" sz="1300" noProof="1" b="1">
                 <a:solidFill>
                   <a:srgbClr val="4E4E4E"/>
                 </a:solidFill>
@@ -7046,7 +7114,7 @@
               <a:t>Визуализация конструкции</a:t>
             </a:r>
             <a:r>
-              <a:rPr lang="en-US" sz="1300">
+              <a:rPr lang="en-US" sz="1300" noProof="1">
                 <a:solidFill>
                   <a:srgbClr val="4E4E4E"/>
                 </a:solidFill>
@@ -7055,7 +7123,7 @@
               </a:rPr>
               <a:t> — разрез перерисовывается при каждом изменении</a:t>
             </a:r>
-            <a:endParaRPr lang="en-US" sz="1300"/>
+            <a:endParaRPr lang="en-US" sz="1300" noProof="1"/>
           </a:p>
         </p:txBody>
       </p:sp>
@@ -7110,7 +7178,7 @@
               </a:lnSpc>
             </a:pPr>
             <a:r>
-              <a:rPr lang="en-US" sz="1300" b="1">
+              <a:rPr lang="en-US" sz="1300" noProof="1" b="1">
                 <a:solidFill>
                   <a:srgbClr val="4E4E4E"/>
                 </a:solidFill>
@@ -7120,7 +7188,7 @@
               <a:t>Автопересчёт</a:t>
             </a:r>
             <a:r>
-              <a:rPr lang="en-US" sz="1300">
+              <a:rPr lang="en-US" sz="1300" noProof="1">
                 <a:solidFill>
                   <a:srgbClr val="4E4E4E"/>
                 </a:solidFill>
@@ -7129,7 +7197,7 @@
               </a:rPr>
               <a:t> — R₁ над трубой, R₂ под трубой, эквивалентная λE</a:t>
             </a:r>
-            <a:endParaRPr lang="en-US" sz="1300"/>
+            <a:endParaRPr lang="en-US" sz="1300" noProof="1"/>
           </a:p>
         </p:txBody>
       </p:sp>
@@ -7217,7 +7285,7 @@
               </a:lnSpc>
             </a:pPr>
             <a:r>
-              <a:rPr lang="en-US" sz="1100">
+              <a:rPr lang="en-US" sz="1100" noProof="1">
                 <a:solidFill>
                   <a:srgbClr val="818181"/>
                 </a:solidFill>
@@ -7226,7 +7294,7 @@
               </a:rPr>
               <a:t>Бетон 100 мм + ЭППС 80 мм + основание: R₁ = 0,0575, R₂ = 5,6374 м²·К/Вт</a:t>
             </a:r>
-            <a:endParaRPr lang="en-US" sz="1100"/>
+            <a:endParaRPr lang="en-US" sz="1100" noProof="1"/>
           </a:p>
         </p:txBody>
       </p:sp>
@@ -7285,7 +7353,7 @@
               </a:lnSpc>
             </a:pPr>
             <a:r>
-              <a:rPr lang="en-US" sz="1100">
+              <a:rPr lang="en-US" sz="1100" noProof="1">
                 <a:solidFill>
                   <a:srgbClr val="818181"/>
                 </a:solidFill>
@@ -7294,7 +7362,7 @@
               </a:rPr>
               <a:t>06</a:t>
             </a:r>
-            <a:endParaRPr lang="en-US" sz="1100"/>
+            <a:endParaRPr lang="en-US" sz="1100" noProof="1"/>
           </a:p>
         </p:txBody>
       </p:sp>
@@ -7362,7 +7430,7 @@
               </a:lnSpc>
             </a:pPr>
             <a:r>
-              <a:rPr lang="en-US" sz="1200" b="1" spc="200" kern="0">
+              <a:rPr lang="en-US" sz="1200" noProof="1" b="1" spc="200" kern="0">
                 <a:solidFill>
                   <a:srgbClr val="E50040"/>
                 </a:solidFill>
@@ -7371,7 +7439,7 @@
               </a:rPr>
               <a:t>ШАГ 3 · ТЕПЛОВОЙ РАСЧЁТ</a:t>
             </a:r>
-            <a:endParaRPr lang="en-US" sz="1200"/>
+            <a:endParaRPr lang="en-US" sz="1200" noProof="1"/>
           </a:p>
         </p:txBody>
       </p:sp>
@@ -7404,7 +7472,7 @@
               </a:lnSpc>
             </a:pPr>
             <a:r>
-              <a:rPr lang="en-US" sz="3000" b="1">
+              <a:rPr lang="en-US" sz="3000" noProof="1" b="1">
                 <a:solidFill>
                   <a:srgbClr val="000000"/>
                 </a:solidFill>
@@ -7413,7 +7481,7 @@
               </a:rPr>
               <a:t>Мощность — за один клик</a:t>
             </a:r>
-            <a:endParaRPr lang="en-US" sz="3000"/>
+            <a:endParaRPr lang="en-US" sz="3000" noProof="1"/>
           </a:p>
         </p:txBody>
       </p:sp>
@@ -7490,7 +7558,7 @@
               </a:lnSpc>
             </a:pPr>
             <a:r>
-              <a:rPr lang="en-US" sz="1300" b="1">
+              <a:rPr lang="en-US" sz="1300" noProof="1" b="1">
                 <a:solidFill>
                   <a:srgbClr val="4E4E4E"/>
                 </a:solidFill>
@@ -7500,7 +7568,7 @@
               <a:t>Режимы работы</a:t>
             </a:r>
             <a:r>
-              <a:rPr lang="en-US" sz="1300">
+              <a:rPr lang="en-US" sz="1300" noProof="1">
                 <a:solidFill>
                   <a:srgbClr val="4E4E4E"/>
                 </a:solidFill>
@@ -7509,7 +7577,7 @@
               </a:rPr>
               <a:t> — таяние (поверхность +5 °C) или поддержание</a:t>
             </a:r>
-            <a:endParaRPr lang="en-US" sz="1300"/>
+            <a:endParaRPr lang="en-US" sz="1300" noProof="1"/>
           </a:p>
         </p:txBody>
       </p:sp>
@@ -7564,7 +7632,7 @@
               </a:lnSpc>
             </a:pPr>
             <a:r>
-              <a:rPr lang="en-US" sz="1300" b="1">
+              <a:rPr lang="en-US" sz="1300" noProof="1" b="1">
                 <a:solidFill>
                   <a:srgbClr val="4E4E4E"/>
                 </a:solidFill>
@@ -7574,7 +7642,7 @@
               <a:t>Труба и шаг укладки</a:t>
             </a:r>
             <a:r>
-              <a:rPr lang="en-US" sz="1300">
+              <a:rPr lang="en-US" sz="1300" noProof="1">
                 <a:solidFill>
                   <a:srgbClr val="4E4E4E"/>
                 </a:solidFill>
@@ -7583,7 +7651,7 @@
               </a:rPr>
               <a:t> — RAUTHERM S 17 / 20 / 25 мм, шаг от 100 мм</a:t>
             </a:r>
-            <a:endParaRPr lang="en-US" sz="1300"/>
+            <a:endParaRPr lang="en-US" sz="1300" noProof="1"/>
           </a:p>
         </p:txBody>
       </p:sp>
@@ -7638,7 +7706,7 @@
               </a:lnSpc>
             </a:pPr>
             <a:r>
-              <a:rPr lang="en-US" sz="1300" b="1">
+              <a:rPr lang="en-US" sz="1300" noProof="1" b="1">
                 <a:solidFill>
                   <a:srgbClr val="4E4E4E"/>
                 </a:solidFill>
@@ -7648,7 +7716,7 @@
               <a:t>Итог расчёта</a:t>
             </a:r>
             <a:r>
-              <a:rPr lang="en-US" sz="1300">
+              <a:rPr lang="en-US" sz="1300" noProof="1">
                 <a:solidFill>
                   <a:srgbClr val="4E4E4E"/>
                 </a:solidFill>
@@ -7657,7 +7725,7 @@
               </a:rPr>
               <a:t> — поток вверх q↑, вниз q↓ и суммарная мощность, Вт/м²</a:t>
             </a:r>
-            <a:endParaRPr lang="en-US" sz="1300"/>
+            <a:endParaRPr lang="en-US" sz="1300" noProof="1"/>
           </a:p>
         </p:txBody>
       </p:sp>
@@ -7712,7 +7780,7 @@
               </a:lnSpc>
             </a:pPr>
             <a:r>
-              <a:rPr lang="en-US" sz="1300" b="1">
+              <a:rPr lang="en-US" sz="1300" noProof="1" b="1">
                 <a:solidFill>
                   <a:srgbClr val="4E4E4E"/>
                 </a:solidFill>
@@ -7722,7 +7790,7 @@
               <a:t>Подсказки в форме</a:t>
             </a:r>
             <a:r>
-              <a:rPr lang="en-US" sz="1300">
+              <a:rPr lang="en-US" sz="1300" noProof="1">
                 <a:solidFill>
                   <a:srgbClr val="4E4E4E"/>
                 </a:solidFill>
@@ -7731,7 +7799,7 @@
               </a:rPr>
               <a:t> — рекомендуемая температура подачи для ΔT = 15 K</a:t>
             </a:r>
-            <a:endParaRPr lang="en-US" sz="1300"/>
+            <a:endParaRPr lang="en-US" sz="1300" noProof="1"/>
           </a:p>
         </p:txBody>
       </p:sp>
@@ -7819,7 +7887,7 @@
               </a:lnSpc>
             </a:pPr>
             <a:r>
-              <a:rPr lang="en-US" sz="1100">
+              <a:rPr lang="en-US" sz="1100" noProof="1">
                 <a:solidFill>
                   <a:srgbClr val="818181"/>
                 </a:solidFill>
@@ -7828,7 +7896,7 @@
               </a:rPr>
               <a:t>Режим Melting, шаг 200 мм: q↑ = 330,5 Вт/м², суммарная — 335,4 Вт/м²</a:t>
             </a:r>
-            <a:endParaRPr lang="en-US" sz="1100"/>
+            <a:endParaRPr lang="en-US" sz="1100" noProof="1"/>
           </a:p>
         </p:txBody>
       </p:sp>
@@ -7887,7 +7955,7 @@
               </a:lnSpc>
             </a:pPr>
             <a:r>
-              <a:rPr lang="en-US" sz="1100">
+              <a:rPr lang="en-US" sz="1100" noProof="1">
                 <a:solidFill>
                   <a:srgbClr val="818181"/>
                 </a:solidFill>
@@ -7896,7 +7964,7 @@
               </a:rPr>
               <a:t>07</a:t>
             </a:r>
-            <a:endParaRPr lang="en-US" sz="1100"/>
+            <a:endParaRPr lang="en-US" sz="1100" noProof="1"/>
           </a:p>
         </p:txBody>
       </p:sp>
@@ -7964,7 +8032,7 @@
               </a:lnSpc>
             </a:pPr>
             <a:r>
-              <a:rPr lang="en-US" sz="1200" b="1" spc="200" kern="0">
+              <a:rPr lang="en-US" sz="1200" noProof="1" b="1" spc="200" kern="0">
                 <a:solidFill>
                   <a:srgbClr val="E50040"/>
                 </a:solidFill>
@@ -7973,7 +8041,7 @@
               </a:rPr>
               <a:t>ШАГ 4 · ГИДРАВЛИКА</a:t>
             </a:r>
-            <a:endParaRPr lang="en-US" sz="1200"/>
+            <a:endParaRPr lang="en-US" sz="1200" noProof="1"/>
           </a:p>
         </p:txBody>
       </p:sp>
@@ -8006,7 +8074,7 @@
               </a:lnSpc>
             </a:pPr>
             <a:r>
-              <a:rPr lang="en-US" sz="3000" b="1">
+              <a:rPr lang="en-US" sz="3000" noProof="1" b="1">
                 <a:solidFill>
                   <a:srgbClr val="000000"/>
                 </a:solidFill>
@@ -8015,7 +8083,7 @@
               </a:rPr>
               <a:t>Гидравлика с балансировкой контуров</a:t>
             </a:r>
-            <a:endParaRPr lang="en-US" sz="3000"/>
+            <a:endParaRPr lang="en-US" sz="3000" noProof="1"/>
           </a:p>
         </p:txBody>
       </p:sp>
@@ -8092,7 +8160,7 @@
               </a:lnSpc>
             </a:pPr>
             <a:r>
-              <a:rPr lang="en-US" sz="1300" b="1">
+              <a:rPr lang="en-US" sz="1300" noProof="1" b="1">
                 <a:solidFill>
                   <a:srgbClr val="4E4E4E"/>
                 </a:solidFill>
@@ -8102,7 +8170,7 @@
               <a:t>Теплоноситель</a:t>
             </a:r>
             <a:r>
-              <a:rPr lang="en-US" sz="1300">
+              <a:rPr lang="en-US" sz="1300" noProof="1">
                 <a:solidFill>
                   <a:srgbClr val="4E4E4E"/>
                 </a:solidFill>
@@ -8111,7 +8179,7 @@
               </a:rPr>
               <a:t> — этилен-/пропиленгликоль 10–90 %, свойства ASHRAE</a:t>
             </a:r>
-            <a:endParaRPr lang="en-US" sz="1300"/>
+            <a:endParaRPr lang="en-US" sz="1300" noProof="1"/>
           </a:p>
         </p:txBody>
       </p:sp>
@@ -8166,7 +8234,7 @@
               </a:lnSpc>
             </a:pPr>
             <a:r>
-              <a:rPr lang="en-US" sz="1300" b="1">
+              <a:rPr lang="en-US" sz="1300" noProof="1" b="1">
                 <a:solidFill>
                   <a:srgbClr val="4E4E4E"/>
                 </a:solidFill>
@@ -8176,7 +8244,7 @@
               <a:t>Контуры по коллекторам</a:t>
             </a:r>
             <a:r>
-              <a:rPr lang="en-US" sz="1300">
+              <a:rPr lang="en-US" sz="1300" noProof="1">
                 <a:solidFill>
                   <a:srgbClr val="4E4E4E"/>
                 </a:solidFill>
@@ -8185,7 +8253,7 @@
               </a:rPr>
               <a:t> — длины, расходы, скорости в каждом контуре</a:t>
             </a:r>
-            <a:endParaRPr lang="en-US" sz="1300"/>
+            <a:endParaRPr lang="en-US" sz="1300" noProof="1"/>
           </a:p>
         </p:txBody>
       </p:sp>
@@ -8240,7 +8308,7 @@
               </a:lnSpc>
             </a:pPr>
             <a:r>
-              <a:rPr lang="en-US" sz="1300" b="1">
+              <a:rPr lang="en-US" sz="1300" noProof="1" b="1">
                 <a:solidFill>
                   <a:srgbClr val="4E4E4E"/>
                 </a:solidFill>
@@ -8250,7 +8318,7 @@
               <a:t>Балансировка по VDI 2075</a:t>
             </a:r>
             <a:r>
-              <a:rPr lang="en-US" sz="1300">
+              <a:rPr lang="en-US" sz="1300" noProof="1">
                 <a:solidFill>
                   <a:srgbClr val="4E4E4E"/>
                 </a:solidFill>
@@ -8259,7 +8327,7 @@
               </a:rPr>
               <a:t> — дросселирование контуров, обороты вентилей</a:t>
             </a:r>
-            <a:endParaRPr lang="en-US" sz="1300"/>
+            <a:endParaRPr lang="en-US" sz="1300" noProof="1"/>
           </a:p>
         </p:txBody>
       </p:sp>
@@ -8314,7 +8382,7 @@
               </a:lnSpc>
             </a:pPr>
             <a:r>
-              <a:rPr lang="en-US" sz="1300" b="1">
+              <a:rPr lang="en-US" sz="1300" noProof="1" b="1">
                 <a:solidFill>
                   <a:srgbClr val="4E4E4E"/>
                 </a:solidFill>
@@ -8324,7 +8392,7 @@
               <a:t>Подбор Kv</a:t>
             </a:r>
             <a:r>
-              <a:rPr lang="en-US" sz="1300">
+              <a:rPr lang="en-US" sz="1300" noProof="1">
                 <a:solidFill>
                   <a:srgbClr val="4E4E4E"/>
                 </a:solidFill>
@@ -8333,7 +8401,7 @@
               </a:rPr>
               <a:t> — клапаны по DIN EN 60534, потери рабочие и холодные</a:t>
             </a:r>
-            <a:endParaRPr lang="en-US" sz="1300"/>
+            <a:endParaRPr lang="en-US" sz="1300" noProof="1"/>
           </a:p>
         </p:txBody>
       </p:sp>
@@ -8421,16 +8489,16 @@
               </a:lnSpc>
             </a:pPr>
             <a:r>
-              <a:rPr lang="en-US" sz="1100">
+              <a:rPr lang="en-US" sz="1100" noProof="1">
                 <a:solidFill>
                   <a:srgbClr val="818181"/>
                 </a:solidFill>
                 <a:latin typeface="MiSans"/>
                 <a:ea typeface="MiSans"/>
               </a:rPr>
-              <a:t>Этиленгликоль 40 %: 4 коллектора, 18 контуров, макс. ΔP раб. = 46,2 кПа</a:t>
-            </a:r>
-            <a:endParaRPr lang="en-US" sz="1100"/>
+              <a:t>Этиленгликоль 40 %: 4 коллектора, 19 контуров, макс. ΔP раб. = 46,2 кПа</a:t>
+            </a:r>
+            <a:endParaRPr lang="en-US" sz="1100" noProof="1"/>
           </a:p>
         </p:txBody>
       </p:sp>
@@ -8489,7 +8557,7 @@
               </a:lnSpc>
             </a:pPr>
             <a:r>
-              <a:rPr lang="en-US" sz="1100">
+              <a:rPr lang="en-US" sz="1100" noProof="1">
                 <a:solidFill>
                   <a:srgbClr val="818181"/>
                 </a:solidFill>
@@ -8498,7 +8566,7 @@
               </a:rPr>
               <a:t>08</a:t>
             </a:r>
-            <a:endParaRPr lang="en-US" sz="1100"/>
+            <a:endParaRPr lang="en-US" sz="1100" noProof="1"/>
           </a:p>
         </p:txBody>
       </p:sp>
@@ -8566,7 +8634,7 @@
               </a:lnSpc>
             </a:pPr>
             <a:r>
-              <a:rPr lang="en-US" sz="1200" b="1" spc="200" kern="0">
+              <a:rPr lang="en-US" sz="1200" noProof="1" b="1" spc="200" kern="0">
                 <a:solidFill>
                   <a:srgbClr val="E50040"/>
                 </a:solidFill>
@@ -8575,7 +8643,7 @@
               </a:rPr>
               <a:t>ШАГ 5 · РЕЗУЛЬТАТЫ</a:t>
             </a:r>
-            <a:endParaRPr lang="en-US" sz="1200"/>
+            <a:endParaRPr lang="en-US" sz="1200" noProof="1"/>
           </a:p>
         </p:txBody>
       </p:sp>
@@ -8608,7 +8676,7 @@
               </a:lnSpc>
             </a:pPr>
             <a:r>
-              <a:rPr lang="en-US" sz="3000" b="1">
+              <a:rPr lang="en-US" sz="3000" noProof="1" b="1">
                 <a:solidFill>
                   <a:srgbClr val="000000"/>
                 </a:solidFill>
@@ -8617,7 +8685,7 @@
               </a:rPr>
               <a:t>Спецификация — сразу после расчёта</a:t>
             </a:r>
-            <a:endParaRPr lang="en-US" sz="3000"/>
+            <a:endParaRPr lang="en-US" sz="3000" noProof="1"/>
           </a:p>
         </p:txBody>
       </p:sp>
@@ -8694,7 +8762,7 @@
               </a:lnSpc>
             </a:pPr>
             <a:r>
-              <a:rPr lang="en-US" sz="1300" b="1">
+              <a:rPr lang="en-US" sz="1300" noProof="1" b="1">
                 <a:solidFill>
                   <a:srgbClr val="4E4E4E"/>
                 </a:solidFill>
@@ -8704,7 +8772,7 @@
               <a:t>Дашборд КПИ</a:t>
             </a:r>
             <a:r>
-              <a:rPr lang="en-US" sz="1300">
+              <a:rPr lang="en-US" sz="1300" noProof="1">
                 <a:solidFill>
                   <a:srgbClr val="4E4E4E"/>
                 </a:solidFill>
@@ -8713,7 +8781,7 @@
               </a:rPr>
               <a:t> — мощность, объём системы, насос, температуры</a:t>
             </a:r>
-            <a:endParaRPr lang="en-US" sz="1300"/>
+            <a:endParaRPr lang="en-US" sz="1300" noProof="1"/>
           </a:p>
         </p:txBody>
       </p:sp>
@@ -8768,7 +8836,7 @@
               </a:lnSpc>
             </a:pPr>
             <a:r>
-              <a:rPr lang="en-US" sz="1300" b="1">
+              <a:rPr lang="en-US" sz="1300" noProof="1" b="1">
                 <a:solidFill>
                   <a:srgbClr val="4E4E4E"/>
                 </a:solidFill>
@@ -8778,7 +8846,7 @@
               <a:t>Ведомость оборудования</a:t>
             </a:r>
             <a:r>
-              <a:rPr lang="en-US" sz="1300">
+              <a:rPr lang="en-US" sz="1300" noProof="1">
                 <a:solidFill>
                   <a:srgbClr val="4E4E4E"/>
                 </a:solidFill>
@@ -8787,7 +8855,7 @@
               </a:rPr>
               <a:t> — коллекторы, труба, бак, насос</a:t>
             </a:r>
-            <a:endParaRPr lang="en-US" sz="1300"/>
+            <a:endParaRPr lang="en-US" sz="1300" noProof="1"/>
           </a:p>
         </p:txBody>
       </p:sp>
@@ -8842,7 +8910,7 @@
               </a:lnSpc>
             </a:pPr>
             <a:r>
-              <a:rPr lang="en-US" sz="1300" b="1">
+              <a:rPr lang="en-US" sz="1300" noProof="1" b="1">
                 <a:solidFill>
                   <a:srgbClr val="4E4E4E"/>
                 </a:solidFill>
@@ -8852,7 +8920,7 @@
               <a:t>Полный контекст</a:t>
             </a:r>
             <a:r>
-              <a:rPr lang="en-US" sz="1300">
+              <a:rPr lang="en-US" sz="1300" noProof="1">
                 <a:solidFill>
                   <a:srgbClr val="4E4E4E"/>
                 </a:solidFill>
@@ -8861,7 +8929,7 @@
               </a:rPr>
               <a:t> — схема конструкции и исходные данные рядом с итогами</a:t>
             </a:r>
-            <a:endParaRPr lang="en-US" sz="1300"/>
+            <a:endParaRPr lang="en-US" sz="1300" noProof="1"/>
           </a:p>
         </p:txBody>
       </p:sp>
@@ -8916,7 +8984,7 @@
               </a:lnSpc>
             </a:pPr>
             <a:r>
-              <a:rPr lang="en-US" sz="1300" b="1">
+              <a:rPr lang="en-US" sz="1300" noProof="1" b="1">
                 <a:solidFill>
                   <a:srgbClr val="4E4E4E"/>
                 </a:solidFill>
@@ -8926,7 +8994,7 @@
               <a:t>Проект в файле .smc</a:t>
             </a:r>
             <a:r>
-              <a:rPr lang="en-US" sz="1300">
+              <a:rPr lang="en-US" sz="1300" noProof="1">
                 <a:solidFill>
                   <a:srgbClr val="4E4E4E"/>
                 </a:solidFill>
@@ -8935,7 +9003,7 @@
               </a:rPr>
               <a:t> — сохранение, открытие, предпросмотр и печать</a:t>
             </a:r>
-            <a:endParaRPr lang="en-US" sz="1300"/>
+            <a:endParaRPr lang="en-US" sz="1300" noProof="1"/>
           </a:p>
         </p:txBody>
       </p:sp>
@@ -9023,7 +9091,7 @@
               </a:lnSpc>
             </a:pPr>
             <a:r>
-              <a:rPr lang="en-US" sz="1100">
+              <a:rPr lang="en-US" sz="1100" noProof="1">
                 <a:solidFill>
                   <a:srgbClr val="818181"/>
                 </a:solidFill>
@@ -9032,7 +9100,7 @@
               </a:rPr>
               <a:t>Проект 9-100000 «Екатеринбург, обогрев наружных поверхностей»</a:t>
             </a:r>
-            <a:endParaRPr lang="en-US" sz="1100"/>
+            <a:endParaRPr lang="en-US" sz="1100" noProof="1"/>
           </a:p>
         </p:txBody>
       </p:sp>
@@ -9091,7 +9159,7 @@
               </a:lnSpc>
             </a:pPr>
             <a:r>
-              <a:rPr lang="en-US" sz="1100">
+              <a:rPr lang="en-US" sz="1100" noProof="1">
                 <a:solidFill>
                   <a:srgbClr val="818181"/>
                 </a:solidFill>
@@ -9100,7 +9168,7 @@
               </a:rPr>
               <a:t>09</a:t>
             </a:r>
-            <a:endParaRPr lang="en-US" sz="1100"/>
+            <a:endParaRPr lang="en-US" sz="1100" noProof="1"/>
           </a:p>
         </p:txBody>
       </p:sp>
@@ -9225,4 +9293,11 @@
     </a:fmtScheme>
   </a:themeElements>
 </a:theme>
+</file>
+
+<file path=customXml/provenance.xml><?xml version="1.0" encoding="utf-8"?>
+<provenance xmlns="urn:kimi:pptd:provenance">
+  <producer>Kimi Slides/Design</producer>
+  <statement>Built by Kimi Slides/Design with PPTD</statement>
+</provenance>
 </file>